--- a/presentation/midterm_draft.pptx
+++ b/presentation/midterm_draft.pptx
@@ -506,7 +506,7 @@
           <a:lstStyle/>
           <a:p>
             <a:r>
-              <a:t>안녕하세요, [팀 이름]입니다. 저희는 이번 학기 수업 일정에 있는 킨텍스 로봇박람회 견학에서 착안해, 성균관대 자연과학캠퍼스에서 일산 킨텍스까지 실제로 가는 59.4km 경로를 자율주행 환경으로 만듭니다. 역할은 오른쪽과 같이 도로 구축 두 명, 일반 차량과 데이터 한 명, AV 학습과 평가 한 명으로 나눴습니다. (약 20초)</a:t>
+              <a:t>안녕하세요, [팀 이름]입니다. 저희는 성균관대 자연과학캠퍼스에서 일산 킨텍스까지 가는 59.4km 실제 경로를 자율주행 환경으로 만듭니다. 핵심은 출구를 놓치면 목적지에 도착할 수 없는 도로라는 점입니다. 핵심 구간 두 곳을 먼저 완성하고 두 곳으로 확장하며, 역할은 오른쪽과 같습니다. (약 20초)</a:t>
             </a:r>
           </a:p>
         </p:txBody>
@@ -576,7 +576,7 @@
           <a:lstStyle/>
           <a:p>
             <a:r>
-              <a:t>이 길을 고른 이유는 세 가지입니다. 첫째, 수업에서 실제로 가는 길입니다. 둘째, 캠퍼스 앞 도심 교차로부터 고속도로, 서부간선지하도로, 한강 횡단, 자유로까지 수도권 도로 유형이 한 경로에 다 있습니다. 셋째, 합류와 분기가 23곳이라 출구를 놓치면 목적지에 갈 수 없습니다. 즉 차선을 언제 바꿀지가 핵심인 도로입니다. (약 35초)</a:t>
+              <a:t>이 도로의 핵심은 차선변경이 선택이 아니라 의무라는 점입니다. 출구까지 남은 거리 안에 목표 차선으로 못 들어가면 경로를 이탈합니다. 합류, 차로 감소, 신호 교차로 같은 상호작용이 한 경로에 모여 있고, 높이 3m 제한 지하도로처럼 이 도로만의 조건도 있습니다. 구간 2를 실측해 보니 약 450m마다 결정 지점이 나왔고, 이 길은 실제 박람회 견학 경로이기도 합니다. (약 35초)</a:t>
             </a:r>
           </a:p>
         </p:txBody>
@@ -646,7 +646,7 @@
           <a:lstStyle/>
           <a:p>
             <a:r>
-              <a:t>60km를 통째로 학습하면 한 에피소드가 한 시간이 넘고, 23곳을 모두 무사히 지나야 해서 충돌률 5%를 맞추기 어렵습니다. 그래서 성격이 다른 대표 구간 네 곳을 골랐습니다. 출발 구간은 신호 교차로와 고속도로 진입, 분기 구간은 지상·지하도로 갈림길, 한강 구간은 성산대교와 강변북로 합류, 도착 구간은 자유로 진출과 킨텍스 도착입니다. OpenStreetMap을 SUMO로 변환한 뒤, 지도 데이터에 빠진 차선 수와 신호를 로드뷰로 보정합니다. (약 40초)</a:t>
+              <a:t>60km를 통째로 학습하면 충돌률 기준을 맞추기 어려워 구간으로 나눴습니다. 핵심은 지상·지하 갈림길과 차로 감소가 있는 구간 2, 출구와 신호, 실제 목적지가 있는 구간 4이고, 학교 앞과 한강 구간으로 확장합니다. 실제 지도를 SUMO로 변환해 로드뷰로 보정하며, 구간 2는 이미 변환해 경로 차량 150대가 모두 완주했습니다. (약 35초)</a:t>
             </a:r>
           </a:p>
         </p:txBody>
@@ -716,7 +716,7 @@
           <a:lstStyle/>
           <a:p>
             <a:r>
-              <a:t>구조마다 생기는 상호작용과 AV의 결정을 정리했습니다. 합류에서는 합류 시점과 속도, 분기와 출구에서는 언제 출구 차선으로 옮길지, 한강 구간의 엇갈림에서는 양보할지 들어갈지, 신호 교차로에서는 정지와 출발을 결정해야 합니다. 지금 기본 관측에는 목표 출구와 신호 정보가 없어서, 이 세 가지를 관측에 추가할 계획입니다. (약 40초)</a:t>
+              <a:t>가장 중요한 상호작용은 분기와 출구입니다. 직진 차량 사이로 출구 차선에 제때 들어가야 하고, 늦으면 경로를 이탈합니다. 그 밖에 합류 차량과 본선 차량, 4차선이 지하 2차선과 지상 2차선으로 갈리는 차로 감소, 신호 교차로, 다중 차선 추월이 있습니다. 지금 기본 관측에는 경로 정보가 없어서, 결정 지점까지 거리와 지금 차선이 경로로 이어지는지, 신호 상태를 관측에 추가할 계획입니다. (약 40초)</a:t>
             </a:r>
           </a:p>
         </p:txBody>
@@ -786,7 +786,7 @@
           <a:lstStyle/>
           <a:p>
             <a:r>
-              <a:t>데이터는 제공된 기본 수집 코드의 항목을 모두 포함하고, 교수님이 필수라고 하신 절대 상태로 AV와 모든 차량의 위치, 속도, 차선을 저장합니다. 여기에 구간 번호, 경로 진행 거리, 출구까지 거리와 목표 차선, 신호 상태를 추가로 제안합니다. 학습용은 NPZ, 전체 상태는 JSONL로 저장해 허깅페이스에 올리고, 네 구간을 병렬로 수집해 10의 7승 개 이상을 모을 계획입니다. 감사합니다. (약 40초)</a:t>
+              <a:t>데이터는 조교님이 제시한 기본 항목 19개를 그대로 모두 저장합니다. 절대 상태로 AV와 모든 차량의 위치, 속도, 차선이 들어갑니다. 추가 항목은 평가 기준을 증명하는 것만 골랐습니다. 경로 이탈 여부, 결정 지점까지 거리, 경로로 이어지는 차선인지, 연속 정지 시간, 주변 차량 수입니다. 에피소드마다 교통량과 정책, 결과를 함께 남기고, 조건을 바꿔 가며 1,000만 개 이상 모아 허깅페이스에 올리겠습니다. 감사합니다. (약 40초)</a:t>
             </a:r>
           </a:p>
         </p:txBody>
@@ -3869,7 +3869,7 @@
                 <a:ea typeface="Apple SD Gothic Neo"/>
                 <a:cs typeface="Apple SD Gothic Neo"/>
               </a:rPr>
-              <a:t>로봇박람회 가는 길을</a:t>
+              <a:t>출구를 놓치면</a:t>
             </a:r>
           </a:p>
           <a:p>
@@ -3883,7 +3883,7 @@
                 <a:ea typeface="Apple SD Gothic Neo"/>
                 <a:cs typeface="Apple SD Gothic Neo"/>
               </a:rPr>
-              <a:t>자율주행차가 달린다</a:t>
+              <a:t>도착할 수 없는 길</a:t>
             </a:r>
           </a:p>
         </p:txBody>
@@ -3971,6 +3971,96 @@
         <p:spPr>
           <a:xfrm>
             <a:off x="1508760" y="4434840"/>
+            <a:ext cx="420624" cy="420624"/>
+          </a:xfrm>
+          <a:prstGeom prst="ellipse">
+            <a:avLst/>
+          </a:prstGeom>
+          <a:solidFill>
+            <a:srgbClr val="8A939E"/>
+          </a:solidFill>
+          <a:ln>
+            <a:noFill/>
+          </a:ln>
+          <a:effectLst/>
+        </p:spPr>
+        <p:style>
+          <a:lnRef idx="1">
+            <a:schemeClr val="accent1"/>
+          </a:lnRef>
+          <a:fillRef idx="3">
+            <a:schemeClr val="accent1"/>
+          </a:fillRef>
+          <a:effectRef idx="2">
+            <a:schemeClr val="accent1"/>
+          </a:effectRef>
+          <a:fontRef idx="minor">
+            <a:schemeClr val="lt1"/>
+          </a:fontRef>
+        </p:style>
+        <p:txBody>
+          <a:bodyPr rtlCol="0" anchor="ctr" lIns="0" rIns="0" tIns="0" bIns="0"/>
+          <a:lstStyle/>
+          <a:p>
+            <a:pPr algn="ctr"/>
+            <a:r>
+              <a:rPr sz="1600" b="1" i="0">
+                <a:solidFill>
+                  <a:srgbClr val="FFFFFF"/>
+                </a:solidFill>
+                <a:latin typeface="Apple SD Gothic Neo"/>
+                <a:ea typeface="Apple SD Gothic Neo"/>
+                <a:cs typeface="Apple SD Gothic Neo"/>
+              </a:rPr>
+              <a:t>1</a:t>
+            </a:r>
+          </a:p>
+        </p:txBody>
+      </p:sp>
+      <p:cxnSp>
+        <p:nvCxnSpPr>
+          <p:cNvPr id="7" name="Connector 6"/>
+          <p:cNvCxnSpPr/>
+          <p:nvPr/>
+        </p:nvCxnSpPr>
+        <p:spPr>
+          <a:xfrm>
+            <a:off x="1965960" y="4645152"/>
+            <a:ext cx="649224" cy="0"/>
+          </a:xfrm>
+          <a:prstGeom prst="line">
+            <a:avLst/>
+          </a:prstGeom>
+          <a:ln w="38100">
+            <a:solidFill>
+              <a:srgbClr val="0B6E4F"/>
+            </a:solidFill>
+          </a:ln>
+        </p:spPr>
+        <p:style>
+          <a:lnRef idx="2">
+            <a:schemeClr val="accent1"/>
+          </a:lnRef>
+          <a:fillRef idx="0">
+            <a:schemeClr val="accent1"/>
+          </a:fillRef>
+          <a:effectRef idx="1">
+            <a:schemeClr val="accent1"/>
+          </a:effectRef>
+          <a:fontRef idx="minor">
+            <a:schemeClr val="tx1"/>
+          </a:fontRef>
+        </p:style>
+      </p:cxnSp>
+      <p:sp>
+        <p:nvSpPr>
+          <p:cNvPr id="8" name="badge_2"/>
+          <p:cNvSpPr/>
+          <p:nvPr/>
+        </p:nvSpPr>
+        <p:spPr>
+          <a:xfrm>
+            <a:off x="2651760" y="4434840"/>
             <a:ext cx="420624" cy="420624"/>
           </a:xfrm>
           <a:prstGeom prst="ellipse">
@@ -4012,20 +4102,20 @@
                 <a:ea typeface="Apple SD Gothic Neo"/>
                 <a:cs typeface="Apple SD Gothic Neo"/>
               </a:rPr>
-              <a:t>1</a:t>
+              <a:t>2</a:t>
             </a:r>
           </a:p>
         </p:txBody>
       </p:sp>
       <p:cxnSp>
         <p:nvCxnSpPr>
-          <p:cNvPr id="7" name="Connector 6"/>
+          <p:cNvPr id="9" name="Connector 8"/>
           <p:cNvCxnSpPr/>
           <p:nvPr/>
         </p:nvCxnSpPr>
         <p:spPr>
           <a:xfrm>
-            <a:off x="1965960" y="4645152"/>
+            <a:off x="3108960" y="4645152"/>
             <a:ext cx="649224" cy="0"/>
           </a:xfrm>
           <a:prstGeom prst="line">
@@ -4054,13 +4144,103 @@
       </p:cxnSp>
       <p:sp>
         <p:nvSpPr>
-          <p:cNvPr id="8" name="badge_2"/>
+          <p:cNvPr id="10" name="badge_3"/>
           <p:cNvSpPr/>
           <p:nvPr/>
         </p:nvSpPr>
         <p:spPr>
           <a:xfrm>
-            <a:off x="2651760" y="4434840"/>
+            <a:off x="3794760" y="4434840"/>
+            <a:ext cx="420624" cy="420624"/>
+          </a:xfrm>
+          <a:prstGeom prst="ellipse">
+            <a:avLst/>
+          </a:prstGeom>
+          <a:solidFill>
+            <a:srgbClr val="8A939E"/>
+          </a:solidFill>
+          <a:ln>
+            <a:noFill/>
+          </a:ln>
+          <a:effectLst/>
+        </p:spPr>
+        <p:style>
+          <a:lnRef idx="1">
+            <a:schemeClr val="accent1"/>
+          </a:lnRef>
+          <a:fillRef idx="3">
+            <a:schemeClr val="accent1"/>
+          </a:fillRef>
+          <a:effectRef idx="2">
+            <a:schemeClr val="accent1"/>
+          </a:effectRef>
+          <a:fontRef idx="minor">
+            <a:schemeClr val="lt1"/>
+          </a:fontRef>
+        </p:style>
+        <p:txBody>
+          <a:bodyPr rtlCol="0" anchor="ctr" lIns="0" rIns="0" tIns="0" bIns="0"/>
+          <a:lstStyle/>
+          <a:p>
+            <a:pPr algn="ctr"/>
+            <a:r>
+              <a:rPr sz="1600" b="1" i="0">
+                <a:solidFill>
+                  <a:srgbClr val="FFFFFF"/>
+                </a:solidFill>
+                <a:latin typeface="Apple SD Gothic Neo"/>
+                <a:ea typeface="Apple SD Gothic Neo"/>
+                <a:cs typeface="Apple SD Gothic Neo"/>
+              </a:rPr>
+              <a:t>3</a:t>
+            </a:r>
+          </a:p>
+        </p:txBody>
+      </p:sp>
+      <p:cxnSp>
+        <p:nvCxnSpPr>
+          <p:cNvPr id="11" name="Connector 10"/>
+          <p:cNvCxnSpPr/>
+          <p:nvPr/>
+        </p:nvCxnSpPr>
+        <p:spPr>
+          <a:xfrm>
+            <a:off x="4251960" y="4645152"/>
+            <a:ext cx="649224" cy="0"/>
+          </a:xfrm>
+          <a:prstGeom prst="line">
+            <a:avLst/>
+          </a:prstGeom>
+          <a:ln w="38100">
+            <a:solidFill>
+              <a:srgbClr val="0B6E4F"/>
+            </a:solidFill>
+          </a:ln>
+        </p:spPr>
+        <p:style>
+          <a:lnRef idx="2">
+            <a:schemeClr val="accent1"/>
+          </a:lnRef>
+          <a:fillRef idx="0">
+            <a:schemeClr val="accent1"/>
+          </a:fillRef>
+          <a:effectRef idx="1">
+            <a:schemeClr val="accent1"/>
+          </a:effectRef>
+          <a:fontRef idx="minor">
+            <a:schemeClr val="tx1"/>
+          </a:fontRef>
+        </p:style>
+      </p:cxnSp>
+      <p:sp>
+        <p:nvSpPr>
+          <p:cNvPr id="12" name="badge_4"/>
+          <p:cNvSpPr/>
+          <p:nvPr/>
+        </p:nvSpPr>
+        <p:spPr>
+          <a:xfrm>
+            <a:off x="4937760" y="4434840"/>
             <a:ext cx="420624" cy="420624"/>
           </a:xfrm>
           <a:prstGeom prst="ellipse">
@@ -4102,186 +4282,6 @@
                 <a:ea typeface="Apple SD Gothic Neo"/>
                 <a:cs typeface="Apple SD Gothic Neo"/>
               </a:rPr>
-              <a:t>2</a:t>
-            </a:r>
-          </a:p>
-        </p:txBody>
-      </p:sp>
-      <p:cxnSp>
-        <p:nvCxnSpPr>
-          <p:cNvPr id="9" name="Connector 8"/>
-          <p:cNvCxnSpPr/>
-          <p:nvPr/>
-        </p:nvCxnSpPr>
-        <p:spPr>
-          <a:xfrm>
-            <a:off x="3108960" y="4645152"/>
-            <a:ext cx="649224" cy="0"/>
-          </a:xfrm>
-          <a:prstGeom prst="line">
-            <a:avLst/>
-          </a:prstGeom>
-          <a:ln w="38100">
-            <a:solidFill>
-              <a:srgbClr val="0B6E4F"/>
-            </a:solidFill>
-          </a:ln>
-        </p:spPr>
-        <p:style>
-          <a:lnRef idx="2">
-            <a:schemeClr val="accent1"/>
-          </a:lnRef>
-          <a:fillRef idx="0">
-            <a:schemeClr val="accent1"/>
-          </a:fillRef>
-          <a:effectRef idx="1">
-            <a:schemeClr val="accent1"/>
-          </a:effectRef>
-          <a:fontRef idx="minor">
-            <a:schemeClr val="tx1"/>
-          </a:fontRef>
-        </p:style>
-      </p:cxnSp>
-      <p:sp>
-        <p:nvSpPr>
-          <p:cNvPr id="10" name="badge_3"/>
-          <p:cNvSpPr/>
-          <p:nvPr/>
-        </p:nvSpPr>
-        <p:spPr>
-          <a:xfrm>
-            <a:off x="3794760" y="4434840"/>
-            <a:ext cx="420624" cy="420624"/>
-          </a:xfrm>
-          <a:prstGeom prst="ellipse">
-            <a:avLst/>
-          </a:prstGeom>
-          <a:solidFill>
-            <a:srgbClr val="F2A900"/>
-          </a:solidFill>
-          <a:ln>
-            <a:noFill/>
-          </a:ln>
-          <a:effectLst/>
-        </p:spPr>
-        <p:style>
-          <a:lnRef idx="1">
-            <a:schemeClr val="accent1"/>
-          </a:lnRef>
-          <a:fillRef idx="3">
-            <a:schemeClr val="accent1"/>
-          </a:fillRef>
-          <a:effectRef idx="2">
-            <a:schemeClr val="accent1"/>
-          </a:effectRef>
-          <a:fontRef idx="minor">
-            <a:schemeClr val="lt1"/>
-          </a:fontRef>
-        </p:style>
-        <p:txBody>
-          <a:bodyPr rtlCol="0" anchor="ctr" lIns="0" rIns="0" tIns="0" bIns="0"/>
-          <a:lstStyle/>
-          <a:p>
-            <a:pPr algn="ctr"/>
-            <a:r>
-              <a:rPr sz="1600" b="1" i="0">
-                <a:solidFill>
-                  <a:srgbClr val="1F2328"/>
-                </a:solidFill>
-                <a:latin typeface="Apple SD Gothic Neo"/>
-                <a:ea typeface="Apple SD Gothic Neo"/>
-                <a:cs typeface="Apple SD Gothic Neo"/>
-              </a:rPr>
-              <a:t>3</a:t>
-            </a:r>
-          </a:p>
-        </p:txBody>
-      </p:sp>
-      <p:cxnSp>
-        <p:nvCxnSpPr>
-          <p:cNvPr id="11" name="Connector 10"/>
-          <p:cNvCxnSpPr/>
-          <p:nvPr/>
-        </p:nvCxnSpPr>
-        <p:spPr>
-          <a:xfrm>
-            <a:off x="4251960" y="4645152"/>
-            <a:ext cx="649224" cy="0"/>
-          </a:xfrm>
-          <a:prstGeom prst="line">
-            <a:avLst/>
-          </a:prstGeom>
-          <a:ln w="38100">
-            <a:solidFill>
-              <a:srgbClr val="0B6E4F"/>
-            </a:solidFill>
-          </a:ln>
-        </p:spPr>
-        <p:style>
-          <a:lnRef idx="2">
-            <a:schemeClr val="accent1"/>
-          </a:lnRef>
-          <a:fillRef idx="0">
-            <a:schemeClr val="accent1"/>
-          </a:fillRef>
-          <a:effectRef idx="1">
-            <a:schemeClr val="accent1"/>
-          </a:effectRef>
-          <a:fontRef idx="minor">
-            <a:schemeClr val="tx1"/>
-          </a:fontRef>
-        </p:style>
-      </p:cxnSp>
-      <p:sp>
-        <p:nvSpPr>
-          <p:cNvPr id="12" name="badge_4"/>
-          <p:cNvSpPr/>
-          <p:nvPr/>
-        </p:nvSpPr>
-        <p:spPr>
-          <a:xfrm>
-            <a:off x="4937760" y="4434840"/>
-            <a:ext cx="420624" cy="420624"/>
-          </a:xfrm>
-          <a:prstGeom prst="ellipse">
-            <a:avLst/>
-          </a:prstGeom>
-          <a:solidFill>
-            <a:srgbClr val="F2A900"/>
-          </a:solidFill>
-          <a:ln>
-            <a:noFill/>
-          </a:ln>
-          <a:effectLst/>
-        </p:spPr>
-        <p:style>
-          <a:lnRef idx="1">
-            <a:schemeClr val="accent1"/>
-          </a:lnRef>
-          <a:fillRef idx="3">
-            <a:schemeClr val="accent1"/>
-          </a:fillRef>
-          <a:effectRef idx="2">
-            <a:schemeClr val="accent1"/>
-          </a:effectRef>
-          <a:fontRef idx="minor">
-            <a:schemeClr val="lt1"/>
-          </a:fontRef>
-        </p:style>
-        <p:txBody>
-          <a:bodyPr rtlCol="0" anchor="ctr" lIns="0" rIns="0" tIns="0" bIns="0"/>
-          <a:lstStyle/>
-          <a:p>
-            <a:pPr algn="ctr"/>
-            <a:r>
-              <a:rPr sz="1600" b="1" i="0">
-                <a:solidFill>
-                  <a:srgbClr val="1F2328"/>
-                </a:solidFill>
-                <a:latin typeface="Apple SD Gothic Neo"/>
-                <a:ea typeface="Apple SD Gothic Neo"/>
-                <a:cs typeface="Apple SD Gothic Neo"/>
-              </a:rPr>
               <a:t>4</a:t>
             </a:r>
           </a:p>
@@ -4332,8 +4332,8 @@
         </p:nvSpPr>
         <p:spPr>
           <a:xfrm>
-            <a:off x="640080" y="5074920"/>
-            <a:ext cx="6400800" cy="365760"/>
+            <a:off x="1417320" y="4956048"/>
+            <a:ext cx="5486400" cy="365760"/>
           </a:xfrm>
           <a:prstGeom prst="rect">
             <a:avLst/>
@@ -4348,6 +4348,54 @@
           <a:p>
             <a:pPr algn="l"/>
             <a:r>
+              <a:rPr sz="1300" b="1" i="0">
+                <a:solidFill>
+                  <a:srgbClr val="F2A900"/>
+                </a:solidFill>
+                <a:latin typeface="Apple SD Gothic Neo"/>
+                <a:ea typeface="Apple SD Gothic Neo"/>
+                <a:cs typeface="Apple SD Gothic Neo"/>
+              </a:rPr>
+              <a:t>● 핵심 구간 2, 4    </a:t>
+            </a:r>
+            <a:r>
+              <a:rPr sz="1300" b="1" i="0">
+                <a:solidFill>
+                  <a:srgbClr val="8A939E"/>
+                </a:solidFill>
+                <a:latin typeface="Apple SD Gothic Neo"/>
+                <a:ea typeface="Apple SD Gothic Neo"/>
+                <a:cs typeface="Apple SD Gothic Neo"/>
+              </a:rPr>
+              <a:t>● 확장 구간 1, 3</a:t>
+            </a:r>
+          </a:p>
+        </p:txBody>
+      </p:sp>
+      <p:sp>
+        <p:nvSpPr>
+          <p:cNvPr id="15" name="TextBox 14"/>
+          <p:cNvSpPr txBox="1"/>
+          <p:nvPr/>
+        </p:nvSpPr>
+        <p:spPr>
+          <a:xfrm>
+            <a:off x="640080" y="5532120"/>
+            <a:ext cx="6400800" cy="365760"/>
+          </a:xfrm>
+          <a:prstGeom prst="rect">
+            <a:avLst/>
+          </a:prstGeom>
+          <a:noFill/>
+        </p:spPr>
+        <p:txBody>
+          <a:bodyPr wrap="square" anchor="t" lIns="0" rIns="0" tIns="0" bIns="0">
+            <a:spAutoFit/>
+          </a:bodyPr>
+          <a:lstStyle/>
+          <a:p>
+            <a:pPr algn="l"/>
+            <a:r>
               <a:rPr sz="1600" b="1" i="0">
                 <a:solidFill>
                   <a:srgbClr val="F2A900"/>
@@ -4363,7 +4411,7 @@
       </p:sp>
       <p:sp>
         <p:nvSpPr>
-          <p:cNvPr id="15" name="team_card"/>
+          <p:cNvPr id="16" name="team_card"/>
           <p:cNvSpPr/>
           <p:nvPr/>
         </p:nvSpPr>
@@ -4409,7 +4457,7 @@
       </p:sp>
       <p:sp>
         <p:nvSpPr>
-          <p:cNvPr id="16" name="TextBox 15"/>
+          <p:cNvPr id="17" name="TextBox 16"/>
           <p:cNvSpPr txBox="1"/>
           <p:nvPr/>
         </p:nvSpPr>
@@ -4446,7 +4494,7 @@
       </p:sp>
       <p:sp>
         <p:nvSpPr>
-          <p:cNvPr id="17" name="badge_A"/>
+          <p:cNvPr id="18" name="badge_A"/>
           <p:cNvSpPr/>
           <p:nvPr/>
         </p:nvSpPr>
@@ -4501,7 +4549,7 @@
       </p:sp>
       <p:sp>
         <p:nvSpPr>
-          <p:cNvPr id="18" name="TextBox 17"/>
+          <p:cNvPr id="19" name="TextBox 18"/>
           <p:cNvSpPr txBox="1"/>
           <p:nvPr/>
         </p:nvSpPr>
@@ -4542,7 +4590,7 @@
                 <a:ea typeface="Apple SD Gothic Neo"/>
                 <a:cs typeface="Apple SD Gothic Neo"/>
               </a:rPr>
-              <a:t>도로 구축 · 구간 1, 2</a:t>
+              <a:t>도로 · 구간 2 (+1)</a:t>
             </a:r>
           </a:p>
           <a:p>
@@ -4563,7 +4611,7 @@
       </p:sp>
       <p:sp>
         <p:nvSpPr>
-          <p:cNvPr id="19" name="badge_B"/>
+          <p:cNvPr id="20" name="badge_B"/>
           <p:cNvSpPr/>
           <p:nvPr/>
         </p:nvSpPr>
@@ -4618,7 +4666,7 @@
       </p:sp>
       <p:sp>
         <p:nvSpPr>
-          <p:cNvPr id="20" name="TextBox 19"/>
+          <p:cNvPr id="21" name="TextBox 20"/>
           <p:cNvSpPr txBox="1"/>
           <p:nvPr/>
         </p:nvSpPr>
@@ -4659,7 +4707,7 @@
                 <a:ea typeface="Apple SD Gothic Neo"/>
                 <a:cs typeface="Apple SD Gothic Neo"/>
               </a:rPr>
-              <a:t>도로 구축 · 구간 3, 4</a:t>
+              <a:t>도로 · 구간 4 (+3)</a:t>
             </a:r>
           </a:p>
           <a:p>
@@ -4673,14 +4721,14 @@
                 <a:ea typeface="Apple SD Gothic Neo"/>
                 <a:cs typeface="Apple SD Gothic Neo"/>
               </a:rPr>
-              <a:t>램프·분기 연결, 경로 검증</a:t>
-            </a:r>
-          </a:p>
-        </p:txBody>
-      </p:sp>
-      <p:sp>
-        <p:nvSpPr>
-          <p:cNvPr id="21" name="badge_C"/>
+              <a:t>램프·출구 연결, 경로 검증</a:t>
+            </a:r>
+          </a:p>
+        </p:txBody>
+      </p:sp>
+      <p:sp>
+        <p:nvSpPr>
+          <p:cNvPr id="22" name="badge_C"/>
           <p:cNvSpPr/>
           <p:nvPr/>
         </p:nvSpPr>
@@ -4735,7 +4783,7 @@
       </p:sp>
       <p:sp>
         <p:nvSpPr>
-          <p:cNvPr id="22" name="TextBox 21"/>
+          <p:cNvPr id="23" name="TextBox 22"/>
           <p:cNvSpPr txBox="1"/>
           <p:nvPr/>
         </p:nvSpPr>
@@ -4790,14 +4838,14 @@
                 <a:ea typeface="Apple SD Gothic Neo"/>
                 <a:cs typeface="Apple SD Gothic Neo"/>
               </a:rPr>
-              <a:t>교통량·경로 생성, 데이터 수집</a:t>
-            </a:r>
-          </a:p>
-        </p:txBody>
-      </p:sp>
-      <p:sp>
-        <p:nvSpPr>
-          <p:cNvPr id="23" name="badge_D"/>
+              <a:t>4종 혼합 교통, 데이터 수집</a:t>
+            </a:r>
+          </a:p>
+        </p:txBody>
+      </p:sp>
+      <p:sp>
+        <p:nvSpPr>
+          <p:cNvPr id="24" name="badge_D"/>
           <p:cNvSpPr/>
           <p:nvPr/>
         </p:nvSpPr>
@@ -4852,7 +4900,7 @@
       </p:sp>
       <p:sp>
         <p:nvSpPr>
-          <p:cNvPr id="24" name="TextBox 23"/>
+          <p:cNvPr id="25" name="TextBox 24"/>
           <p:cNvSpPr txBox="1"/>
           <p:nvPr/>
         </p:nvSpPr>
@@ -4962,7 +5010,7 @@
                 <a:ea typeface="Apple SD Gothic Neo"/>
                 <a:cs typeface="Apple SD Gothic Neo"/>
               </a:rPr>
-              <a:t>왜 이 길인가</a:t>
+              <a:t>반드시 해야 하는 차선변경</a:t>
             </a:r>
           </a:p>
         </p:txBody>
@@ -4999,7 +5047,7 @@
                 <a:ea typeface="Apple SD Gothic Neo"/>
                 <a:cs typeface="Apple SD Gothic Neo"/>
               </a:rPr>
-              <a:t>수업에서 실제로 가는 길에, 수도권 도로 유형이 한 줄로 이어져 있다</a:t>
+              <a:t>추월처럼 해도 되는 선택이 아니라, 안 하면 목적지에 못 가는 결정이 계속 나온다</a:t>
             </a:r>
           </a:p>
         </p:txBody>
@@ -5036,7 +5084,7 @@
         </p:nvSpPr>
         <p:spPr>
           <a:xfrm>
-            <a:off x="548640" y="1709928"/>
+            <a:off x="548640" y="1664208"/>
             <a:ext cx="402336" cy="402336"/>
           </a:xfrm>
           <a:prstGeom prst="ellipse">
@@ -5091,8 +5139,8 @@
         </p:nvSpPr>
         <p:spPr>
           <a:xfrm>
-            <a:off x="1143000" y="1655064"/>
-            <a:ext cx="6675120" cy="914400"/>
+            <a:off x="1143000" y="1609344"/>
+            <a:ext cx="6766560" cy="914400"/>
           </a:xfrm>
           <a:prstGeom prst="rect">
             <a:avLst/>
@@ -5115,7 +5163,7 @@
                 <a:ea typeface="Apple SD Gothic Neo"/>
                 <a:cs typeface="Apple SD Gothic Neo"/>
               </a:rPr>
-              <a:t>실제로 가는 길</a:t>
+              <a:t>기한 있는 차선변경</a:t>
             </a:r>
           </a:p>
           <a:p>
@@ -5129,7 +5177,7 @@
                 <a:ea typeface="Apple SD Gothic Neo"/>
                 <a:cs typeface="Apple SD Gothic Neo"/>
               </a:rPr>
-              <a:t>킨텍스 로봇박람회 견학 경로. 발표 영상과 견학 보고서가 하나의 이야기로 이어진다</a:t>
+              <a:t>출구까지 남은 거리 안에 목표 차선으로 들어가야 한다. 늦으면 경로 이탈, 서두르면 충돌 위험</a:t>
             </a:r>
           </a:p>
         </p:txBody>
@@ -5142,7 +5190,7 @@
         </p:nvSpPr>
         <p:spPr>
           <a:xfrm>
-            <a:off x="548640" y="2734056"/>
+            <a:off x="548640" y="2642616"/>
             <a:ext cx="402336" cy="402336"/>
           </a:xfrm>
           <a:prstGeom prst="ellipse">
@@ -5197,8 +5245,8 @@
         </p:nvSpPr>
         <p:spPr>
           <a:xfrm>
-            <a:off x="1143000" y="2679192"/>
-            <a:ext cx="6675120" cy="914400"/>
+            <a:off x="1143000" y="2587752"/>
+            <a:ext cx="6766560" cy="914400"/>
           </a:xfrm>
           <a:prstGeom prst="rect">
             <a:avLst/>
@@ -5221,7 +5269,7 @@
                 <a:ea typeface="Apple SD Gothic Neo"/>
                 <a:cs typeface="Apple SD Gothic Neo"/>
               </a:rPr>
-              <a:t>도로 유형이 다양함</a:t>
+              <a:t>한 경로에 모인 상호작용</a:t>
             </a:r>
           </a:p>
           <a:p>
@@ -5235,7 +5283,7 @@
                 <a:ea typeface="Apple SD Gothic Neo"/>
                 <a:cs typeface="Apple SD Gothic Neo"/>
               </a:rPr>
-              <a:t>캠퍼스 앞 도심 교차로 → 고속도로 → 지하 고속화도로 → 한강 횡단 → 자유로</a:t>
+              <a:t>합류 차량과 본선 차량, 차로 감소 구간의 양보, 다중 차선 변경, 신호 교차로 통과</a:t>
             </a:r>
           </a:p>
         </p:txBody>
@@ -5248,7 +5296,7 @@
         </p:nvSpPr>
         <p:spPr>
           <a:xfrm>
-            <a:off x="548640" y="3758183"/>
+            <a:off x="548640" y="3621024"/>
             <a:ext cx="402336" cy="402336"/>
           </a:xfrm>
           <a:prstGeom prst="ellipse">
@@ -5303,8 +5351,8 @@
         </p:nvSpPr>
         <p:spPr>
           <a:xfrm>
-            <a:off x="1143000" y="3703320"/>
-            <a:ext cx="6675120" cy="914400"/>
+            <a:off x="1143000" y="3566160"/>
+            <a:ext cx="6766560" cy="914400"/>
           </a:xfrm>
           <a:prstGeom prst="rect">
             <a:avLst/>
@@ -5327,7 +5375,7 @@
                 <a:ea typeface="Apple SD Gothic Neo"/>
                 <a:cs typeface="Apple SD Gothic Neo"/>
               </a:rPr>
-              <a:t>결정 없이는 도착 못 함</a:t>
+              <a:t>이 도로만의 조건</a:t>
             </a:r>
           </a:p>
           <a:p>
@@ -5341,21 +5389,58 @@
                 <a:ea typeface="Apple SD Gothic Neo"/>
                 <a:cs typeface="Apple SD Gothic Neo"/>
               </a:rPr>
-              <a:t>출구를 놓치면 다른 도시로 빠진다. 합류·분기 지점마다 차선 판단이 필요하다</a:t>
-            </a:r>
-          </a:p>
-        </p:txBody>
-      </p:sp>
-      <p:sp>
-        <p:nvSpPr>
-          <p:cNvPr id="11" name="stat_0"/>
+              <a:t>높이 3m 제한 지하도로에서 차종별로 갈 길이 갈리고, 고속도로 80~100km/h와 도심 50km/h를 오간다</a:t>
+            </a:r>
+          </a:p>
+        </p:txBody>
+      </p:sp>
+      <p:sp>
+        <p:nvSpPr>
+          <p:cNvPr id="11" name="TextBox 10"/>
+          <p:cNvSpPr txBox="1"/>
+          <p:nvPr/>
+        </p:nvSpPr>
+        <p:spPr>
+          <a:xfrm>
+            <a:off x="548640" y="4572000"/>
+            <a:ext cx="7406640" cy="365760"/>
+          </a:xfrm>
+          <a:prstGeom prst="rect">
+            <a:avLst/>
+          </a:prstGeom>
+          <a:noFill/>
+        </p:spPr>
+        <p:txBody>
+          <a:bodyPr wrap="square" anchor="t" lIns="0" rIns="0" tIns="0" bIns="0">
+            <a:spAutoFit/>
+          </a:bodyPr>
+          <a:lstStyle/>
+          <a:p>
+            <a:pPr algn="l"/>
+            <a:r>
+              <a:rPr sz="1300" b="0" i="0">
+                <a:solidFill>
+                  <a:srgbClr val="5B636E"/>
+                </a:solidFill>
+                <a:latin typeface="Apple SD Gothic Neo"/>
+                <a:ea typeface="Apple SD Gothic Neo"/>
+                <a:cs typeface="Apple SD Gothic Neo"/>
+              </a:rPr>
+              <a:t>그리고 이 길은 수업에서 실제로 가는 킨텍스 로봇박람회 견학 경로다</a:t>
+            </a:r>
+          </a:p>
+        </p:txBody>
+      </p:sp>
+      <p:sp>
+        <p:nvSpPr>
+          <p:cNvPr id="12" name="stat_0"/>
           <p:cNvSpPr/>
           <p:nvPr/>
         </p:nvSpPr>
         <p:spPr>
           <a:xfrm>
-            <a:off x="548640" y="4892040"/>
-            <a:ext cx="2286000" cy="1325880"/>
+            <a:off x="548640" y="5029200"/>
+            <a:ext cx="2286000" cy="1280160"/>
           </a:xfrm>
           <a:prstGeom prst="roundRect">
             <a:avLst>
@@ -5394,14 +5479,14 @@
       </p:sp>
       <p:sp>
         <p:nvSpPr>
-          <p:cNvPr id="12" name="TextBox 11"/>
+          <p:cNvPr id="13" name="TextBox 12"/>
           <p:cNvSpPr txBox="1"/>
           <p:nvPr/>
         </p:nvSpPr>
         <p:spPr>
           <a:xfrm>
-            <a:off x="777240" y="4956048"/>
-            <a:ext cx="1920240" cy="777240"/>
+            <a:off x="777240" y="5084064"/>
+            <a:ext cx="1920240" cy="731520"/>
           </a:xfrm>
           <a:prstGeom prst="rect">
             <a:avLst/>
@@ -5416,7 +5501,7 @@
           <a:p>
             <a:pPr algn="l"/>
             <a:r>
-              <a:rPr sz="3600" b="1" i="0">
+              <a:rPr sz="3400" b="1" i="0">
                 <a:solidFill>
                   <a:srgbClr val="0B6E4F"/>
                 </a:solidFill>
@@ -5442,14 +5527,14 @@
       </p:sp>
       <p:sp>
         <p:nvSpPr>
-          <p:cNvPr id="13" name="TextBox 12"/>
+          <p:cNvPr id="14" name="TextBox 13"/>
           <p:cNvSpPr txBox="1"/>
           <p:nvPr/>
         </p:nvSpPr>
         <p:spPr>
           <a:xfrm>
-            <a:off x="777240" y="5669280"/>
-            <a:ext cx="1920240" cy="411480"/>
+            <a:off x="777240" y="5788152"/>
+            <a:ext cx="1965960" cy="457200"/>
           </a:xfrm>
           <a:prstGeom prst="rect">
             <a:avLst/>
@@ -5464,7 +5549,7 @@
           <a:p>
             <a:pPr algn="l"/>
             <a:r>
-              <a:rPr sz="1300" b="0" i="0">
+              <a:rPr sz="1200" b="0" i="0">
                 <a:solidFill>
                   <a:srgbClr val="5B636E"/>
                 </a:solidFill>
@@ -5479,14 +5564,14 @@
       </p:sp>
       <p:sp>
         <p:nvSpPr>
-          <p:cNvPr id="14" name="stat_1"/>
+          <p:cNvPr id="15" name="stat_1"/>
           <p:cNvSpPr/>
           <p:nvPr/>
         </p:nvSpPr>
         <p:spPr>
           <a:xfrm>
-            <a:off x="3063240" y="4892040"/>
-            <a:ext cx="2286000" cy="1325880"/>
+            <a:off x="3063240" y="5029200"/>
+            <a:ext cx="2286000" cy="1280160"/>
           </a:xfrm>
           <a:prstGeom prst="roundRect">
             <a:avLst>
@@ -5525,14 +5610,14 @@
       </p:sp>
       <p:sp>
         <p:nvSpPr>
-          <p:cNvPr id="15" name="TextBox 14"/>
+          <p:cNvPr id="16" name="TextBox 15"/>
           <p:cNvSpPr txBox="1"/>
           <p:nvPr/>
         </p:nvSpPr>
         <p:spPr>
           <a:xfrm>
-            <a:off x="3291840" y="4956048"/>
-            <a:ext cx="1920240" cy="777240"/>
+            <a:off x="3291840" y="5084064"/>
+            <a:ext cx="1920240" cy="731520"/>
           </a:xfrm>
           <a:prstGeom prst="rect">
             <a:avLst/>
@@ -5547,7 +5632,7 @@
           <a:p>
             <a:pPr algn="l"/>
             <a:r>
-              <a:rPr sz="3600" b="1" i="0">
+              <a:rPr sz="3400" b="1" i="0">
                 <a:solidFill>
                   <a:srgbClr val="0B6E4F"/>
                 </a:solidFill>
@@ -5555,7 +5640,7 @@
                 <a:ea typeface="Apple SD Gothic Neo"/>
                 <a:cs typeface="Apple SD Gothic Neo"/>
               </a:rPr>
-              <a:t>23</a:t>
+              <a:t>450</a:t>
             </a:r>
             <a:r>
               <a:rPr sz="1600" b="1" i="0">
@@ -5566,21 +5651,21 @@
                 <a:ea typeface="Apple SD Gothic Neo"/>
                 <a:cs typeface="Apple SD Gothic Neo"/>
               </a:rPr>
-              <a:t> 곳</a:t>
-            </a:r>
-          </a:p>
-        </p:txBody>
-      </p:sp>
-      <p:sp>
-        <p:nvSpPr>
-          <p:cNvPr id="16" name="TextBox 15"/>
+              <a:t> m</a:t>
+            </a:r>
+          </a:p>
+        </p:txBody>
+      </p:sp>
+      <p:sp>
+        <p:nvSpPr>
+          <p:cNvPr id="17" name="TextBox 16"/>
           <p:cNvSpPr txBox="1"/>
           <p:nvPr/>
         </p:nvSpPr>
         <p:spPr>
           <a:xfrm>
-            <a:off x="3291840" y="5669280"/>
-            <a:ext cx="1920240" cy="411480"/>
+            <a:off x="3291840" y="5788152"/>
+            <a:ext cx="1965960" cy="457200"/>
           </a:xfrm>
           <a:prstGeom prst="rect">
             <a:avLst/>
@@ -5595,7 +5680,7 @@
           <a:p>
             <a:pPr algn="l"/>
             <a:r>
-              <a:rPr sz="1300" b="0" i="0">
+              <a:rPr sz="1200" b="0" i="0">
                 <a:solidFill>
                   <a:srgbClr val="5B636E"/>
                 </a:solidFill>
@@ -5603,21 +5688,21 @@
                 <a:ea typeface="Apple SD Gothic Neo"/>
                 <a:cs typeface="Apple SD Gothic Neo"/>
               </a:rPr>
-              <a:t>합류·분기·회전</a:t>
-            </a:r>
-          </a:p>
-        </p:txBody>
-      </p:sp>
-      <p:sp>
-        <p:nvSpPr>
-          <p:cNvPr id="17" name="stat_2"/>
+              <a:t>마다 결정 지점 (구간 2 실측)</a:t>
+            </a:r>
+          </a:p>
+        </p:txBody>
+      </p:sp>
+      <p:sp>
+        <p:nvSpPr>
+          <p:cNvPr id="18" name="stat_2"/>
           <p:cNvSpPr/>
           <p:nvPr/>
         </p:nvSpPr>
         <p:spPr>
           <a:xfrm>
-            <a:off x="5577840" y="4892040"/>
-            <a:ext cx="2286000" cy="1325880"/>
+            <a:off x="5577840" y="5029200"/>
+            <a:ext cx="2286000" cy="1280160"/>
           </a:xfrm>
           <a:prstGeom prst="roundRect">
             <a:avLst>
@@ -5656,14 +5741,14 @@
       </p:sp>
       <p:sp>
         <p:nvSpPr>
-          <p:cNvPr id="18" name="TextBox 17"/>
+          <p:cNvPr id="19" name="TextBox 18"/>
           <p:cNvSpPr txBox="1"/>
           <p:nvPr/>
         </p:nvSpPr>
         <p:spPr>
           <a:xfrm>
-            <a:off x="5806440" y="4956048"/>
-            <a:ext cx="1920240" cy="777240"/>
+            <a:off x="5806440" y="5084064"/>
+            <a:ext cx="1920240" cy="731520"/>
           </a:xfrm>
           <a:prstGeom prst="rect">
             <a:avLst/>
@@ -5678,7 +5763,7 @@
           <a:p>
             <a:pPr algn="l"/>
             <a:r>
-              <a:rPr sz="3600" b="1" i="0">
+              <a:rPr sz="3400" b="1" i="0">
                 <a:solidFill>
                   <a:srgbClr val="0B6E4F"/>
                 </a:solidFill>
@@ -5686,7 +5771,7 @@
                 <a:ea typeface="Apple SD Gothic Neo"/>
                 <a:cs typeface="Apple SD Gothic Neo"/>
               </a:rPr>
-              <a:t>4</a:t>
+              <a:t>2+2</a:t>
             </a:r>
             <a:r>
               <a:rPr sz="1600" b="1" i="0">
@@ -5697,21 +5782,21 @@
                 <a:ea typeface="Apple SD Gothic Neo"/>
                 <a:cs typeface="Apple SD Gothic Neo"/>
               </a:rPr>
-              <a:t> 개</a:t>
-            </a:r>
-          </a:p>
-        </p:txBody>
-      </p:sp>
-      <p:sp>
-        <p:nvSpPr>
-          <p:cNvPr id="19" name="TextBox 18"/>
+              <a:t/>
+            </a:r>
+          </a:p>
+        </p:txBody>
+      </p:sp>
+      <p:sp>
+        <p:nvSpPr>
+          <p:cNvPr id="20" name="TextBox 19"/>
           <p:cNvSpPr txBox="1"/>
           <p:nvPr/>
         </p:nvSpPr>
         <p:spPr>
           <a:xfrm>
-            <a:off x="5806440" y="5669280"/>
-            <a:ext cx="1920240" cy="411480"/>
+            <a:off x="5806440" y="5788152"/>
+            <a:ext cx="1965960" cy="457200"/>
           </a:xfrm>
           <a:prstGeom prst="rect">
             <a:avLst/>
@@ -5726,7 +5811,7 @@
           <a:p>
             <a:pPr algn="l"/>
             <a:r>
-              <a:rPr sz="1300" b="0" i="0">
+              <a:rPr sz="1200" b="0" i="0">
                 <a:solidFill>
                   <a:srgbClr val="5B636E"/>
                 </a:solidFill>
@@ -5734,7 +5819,7 @@
                 <a:ea typeface="Apple SD Gothic Neo"/>
                 <a:cs typeface="Apple SD Gothic Neo"/>
               </a:rPr>
-              <a:t>학습·평가 구간</a:t>
+              <a:t>핵심 + 확장 구간</a:t>
             </a:r>
           </a:p>
         </p:txBody>
@@ -5789,7 +5874,7 @@
                 <a:ea typeface="Apple SD Gothic Neo"/>
                 <a:cs typeface="Apple SD Gothic Neo"/>
               </a:rPr>
-              <a:t>4개 구간으로 나눠 구현한다</a:t>
+              <a:t>핵심 2구간을 먼저, 2구간으로 확장</a:t>
             </a:r>
           </a:p>
         </p:txBody>
@@ -5826,7 +5911,7 @@
                 <a:ea typeface="Apple SD Gothic Neo"/>
                 <a:cs typeface="Apple SD Gothic Neo"/>
               </a:rPr>
-              <a:t>59.4 km 전체는 시연 영상으로, 학습·평가는 성격이 다른 대표 구간 4곳에서</a:t>
+              <a:t>60 km는 시연 영상으로, 학습·평가는 성격이 다른 구간에서</a:t>
             </a:r>
           </a:p>
         </p:txBody>
@@ -5840,7 +5925,7 @@
         <p:spPr>
           <a:xfrm>
             <a:off x="548640" y="1508760"/>
-            <a:ext cx="2651760" cy="3840480"/>
+            <a:ext cx="2651760" cy="3886200"/>
           </a:xfrm>
           <a:prstGeom prst="roundRect">
             <a:avLst>
@@ -5916,6 +6001,389 @@
             <a:avLst/>
           </a:prstGeom>
           <a:solidFill>
+            <a:srgbClr val="8A939E"/>
+          </a:solidFill>
+          <a:ln>
+            <a:noFill/>
+          </a:ln>
+          <a:effectLst/>
+        </p:spPr>
+        <p:style>
+          <a:lnRef idx="1">
+            <a:schemeClr val="accent1"/>
+          </a:lnRef>
+          <a:fillRef idx="3">
+            <a:schemeClr val="accent1"/>
+          </a:fillRef>
+          <a:effectRef idx="2">
+            <a:schemeClr val="accent1"/>
+          </a:effectRef>
+          <a:fontRef idx="minor">
+            <a:schemeClr val="lt1"/>
+          </a:fontRef>
+        </p:style>
+        <p:txBody>
+          <a:bodyPr rtlCol="0" anchor="ctr" lIns="0" rIns="0" tIns="0" bIns="0"/>
+          <a:lstStyle/>
+          <a:p>
+            <a:pPr algn="ctr"/>
+            <a:r>
+              <a:rPr sz="1500" b="1" i="0">
+                <a:solidFill>
+                  <a:srgbClr val="FFFFFF"/>
+                </a:solidFill>
+                <a:latin typeface="Apple SD Gothic Neo"/>
+                <a:ea typeface="Apple SD Gothic Neo"/>
+                <a:cs typeface="Apple SD Gothic Neo"/>
+              </a:rPr>
+              <a:t>1</a:t>
+            </a:r>
+          </a:p>
+        </p:txBody>
+      </p:sp>
+      <p:sp>
+        <p:nvSpPr>
+          <p:cNvPr id="7" name="prio_1"/>
+          <p:cNvSpPr/>
+          <p:nvPr/>
+        </p:nvSpPr>
+        <p:spPr>
+          <a:xfrm>
+            <a:off x="2331720" y="1719072"/>
+            <a:ext cx="685800" cy="329184"/>
+          </a:xfrm>
+          <a:prstGeom prst="roundRect">
+            <a:avLst>
+              <a:gd name="adj" fmla="val 30000"/>
+            </a:avLst>
+          </a:prstGeom>
+          <a:solidFill>
+            <a:srgbClr val="8A939E"/>
+          </a:solidFill>
+          <a:ln>
+            <a:noFill/>
+          </a:ln>
+          <a:effectLst/>
+        </p:spPr>
+        <p:style>
+          <a:lnRef idx="1">
+            <a:schemeClr val="accent1"/>
+          </a:lnRef>
+          <a:fillRef idx="3">
+            <a:schemeClr val="accent1"/>
+          </a:fillRef>
+          <a:effectRef idx="2">
+            <a:schemeClr val="accent1"/>
+          </a:effectRef>
+          <a:fontRef idx="minor">
+            <a:schemeClr val="lt1"/>
+          </a:fontRef>
+        </p:style>
+        <p:txBody>
+          <a:bodyPr rtlCol="0" anchor="ctr"/>
+          <a:lstStyle/>
+          <a:p>
+            <a:pPr algn="ctr"/>
+          </a:p>
+        </p:txBody>
+      </p:sp>
+      <p:sp>
+        <p:nvSpPr>
+          <p:cNvPr id="8" name="TextBox 7"/>
+          <p:cNvSpPr txBox="1"/>
+          <p:nvPr/>
+        </p:nvSpPr>
+        <p:spPr>
+          <a:xfrm>
+            <a:off x="2331720" y="1719072"/>
+            <a:ext cx="685800" cy="329184"/>
+          </a:xfrm>
+          <a:prstGeom prst="rect">
+            <a:avLst/>
+          </a:prstGeom>
+          <a:noFill/>
+        </p:spPr>
+        <p:txBody>
+          <a:bodyPr wrap="square" anchor="ctr" lIns="0" rIns="0" tIns="0" bIns="0">
+            <a:spAutoFit/>
+          </a:bodyPr>
+          <a:lstStyle/>
+          <a:p>
+            <a:pPr algn="ctr"/>
+            <a:r>
+              <a:rPr sz="1200" b="1" i="0">
+                <a:solidFill>
+                  <a:srgbClr val="FFFFFF"/>
+                </a:solidFill>
+                <a:latin typeface="Apple SD Gothic Neo"/>
+                <a:ea typeface="Apple SD Gothic Neo"/>
+                <a:cs typeface="Apple SD Gothic Neo"/>
+              </a:rPr>
+              <a:t>확장</a:t>
+            </a:r>
+          </a:p>
+        </p:txBody>
+      </p:sp>
+      <p:sp>
+        <p:nvSpPr>
+          <p:cNvPr id="9" name="TextBox 8"/>
+          <p:cNvSpPr txBox="1"/>
+          <p:nvPr/>
+        </p:nvSpPr>
+        <p:spPr>
+          <a:xfrm>
+            <a:off x="685800" y="3543300"/>
+            <a:ext cx="2377440" cy="411480"/>
+          </a:xfrm>
+          <a:prstGeom prst="rect">
+            <a:avLst/>
+          </a:prstGeom>
+          <a:noFill/>
+        </p:spPr>
+        <p:txBody>
+          <a:bodyPr wrap="square" anchor="t" lIns="0" rIns="0" tIns="0" bIns="0">
+            <a:spAutoFit/>
+          </a:bodyPr>
+          <a:lstStyle/>
+          <a:p>
+            <a:pPr algn="l"/>
+            <a:r>
+              <a:rPr sz="1700" b="1" i="0">
+                <a:solidFill>
+                  <a:srgbClr val="1F2328"/>
+                </a:solidFill>
+                <a:latin typeface="Apple SD Gothic Neo"/>
+                <a:ea typeface="Apple SD Gothic Neo"/>
+                <a:cs typeface="Apple SD Gothic Neo"/>
+              </a:rPr>
+              <a:t>출발</a:t>
+            </a:r>
+            <a:r>
+              <a:rPr sz="1400" b="0" i="0">
+                <a:solidFill>
+                  <a:srgbClr val="5B636E"/>
+                </a:solidFill>
+                <a:latin typeface="Apple SD Gothic Neo"/>
+                <a:ea typeface="Apple SD Gothic Neo"/>
+                <a:cs typeface="Apple SD Gothic Neo"/>
+              </a:rPr>
+              <a:t>  6.2 km</a:t>
+            </a:r>
+          </a:p>
+        </p:txBody>
+      </p:sp>
+      <p:sp>
+        <p:nvSpPr>
+          <p:cNvPr id="10" name="TextBox 9"/>
+          <p:cNvSpPr txBox="1"/>
+          <p:nvPr/>
+        </p:nvSpPr>
+        <p:spPr>
+          <a:xfrm>
+            <a:off x="685800" y="3927348"/>
+            <a:ext cx="2377440" cy="548640"/>
+          </a:xfrm>
+          <a:prstGeom prst="rect">
+            <a:avLst/>
+          </a:prstGeom>
+          <a:noFill/>
+        </p:spPr>
+        <p:txBody>
+          <a:bodyPr wrap="square" anchor="t" lIns="0" rIns="0" tIns="0" bIns="0">
+            <a:spAutoFit/>
+          </a:bodyPr>
+          <a:lstStyle/>
+          <a:p>
+            <a:pPr algn="l"/>
+            <a:r>
+              <a:rPr sz="1200" b="0" i="0">
+                <a:solidFill>
+                  <a:srgbClr val="5B636E"/>
+                </a:solidFill>
+                <a:latin typeface="Apple SD Gothic Neo"/>
+                <a:ea typeface="Apple SD Gothic Neo"/>
+                <a:cs typeface="Apple SD Gothic Neo"/>
+              </a:rPr>
+              <a:t>캠퍼스 → 수인로 → 수원문산고속도로</a:t>
+            </a:r>
+          </a:p>
+        </p:txBody>
+      </p:sp>
+      <p:sp>
+        <p:nvSpPr>
+          <p:cNvPr id="11" name="TextBox 10"/>
+          <p:cNvSpPr txBox="1"/>
+          <p:nvPr/>
+        </p:nvSpPr>
+        <p:spPr>
+          <a:xfrm>
+            <a:off x="685800" y="4457700"/>
+            <a:ext cx="2377440" cy="566928"/>
+          </a:xfrm>
+          <a:prstGeom prst="rect">
+            <a:avLst/>
+          </a:prstGeom>
+          <a:noFill/>
+        </p:spPr>
+        <p:txBody>
+          <a:bodyPr wrap="square" anchor="t" lIns="0" rIns="0" tIns="0" bIns="0">
+            <a:spAutoFit/>
+          </a:bodyPr>
+          <a:lstStyle/>
+          <a:p>
+            <a:pPr algn="l"/>
+            <a:r>
+              <a:rPr sz="1300" b="1" i="0">
+                <a:solidFill>
+                  <a:srgbClr val="0B6E4F"/>
+                </a:solidFill>
+                <a:latin typeface="Apple SD Gothic Neo"/>
+                <a:ea typeface="Apple SD Gothic Neo"/>
+                <a:cs typeface="Apple SD Gothic Neo"/>
+              </a:rPr>
+              <a:t>· 신호 교차로</a:t>
+            </a:r>
+          </a:p>
+          <a:p>
+            <a:pPr algn="l"/>
+            <a:r>
+              <a:rPr sz="1300" b="1" i="0">
+                <a:solidFill>
+                  <a:srgbClr val="0B6E4F"/>
+                </a:solidFill>
+                <a:latin typeface="Apple SD Gothic Neo"/>
+                <a:ea typeface="Apple SD Gothic Neo"/>
+                <a:cs typeface="Apple SD Gothic Neo"/>
+              </a:rPr>
+              <a:t>· 진입 램프 합류</a:t>
+            </a:r>
+          </a:p>
+        </p:txBody>
+      </p:sp>
+      <p:sp>
+        <p:nvSpPr>
+          <p:cNvPr id="12" name="TextBox 11"/>
+          <p:cNvSpPr txBox="1"/>
+          <p:nvPr/>
+        </p:nvSpPr>
+        <p:spPr>
+          <a:xfrm>
+            <a:off x="685800" y="5024628"/>
+            <a:ext cx="2377440" cy="320040"/>
+          </a:xfrm>
+          <a:prstGeom prst="rect">
+            <a:avLst/>
+          </a:prstGeom>
+          <a:noFill/>
+        </p:spPr>
+        <p:txBody>
+          <a:bodyPr wrap="square" anchor="t" lIns="0" rIns="0" tIns="0" bIns="0">
+            <a:spAutoFit/>
+          </a:bodyPr>
+          <a:lstStyle/>
+          <a:p>
+            <a:pPr algn="l"/>
+            <a:r>
+              <a:rPr sz="1200" b="1" i="0">
+                <a:solidFill>
+                  <a:srgbClr val="5B636E"/>
+                </a:solidFill>
+                <a:latin typeface="Apple SD Gothic Neo"/>
+                <a:ea typeface="Apple SD Gothic Neo"/>
+                <a:cs typeface="Apple SD Gothic Neo"/>
+              </a:rPr>
+              <a:t>지도 정보 10%</a:t>
+            </a:r>
+          </a:p>
+        </p:txBody>
+      </p:sp>
+      <p:sp>
+        <p:nvSpPr>
+          <p:cNvPr id="13" name="seg_card_2"/>
+          <p:cNvSpPr/>
+          <p:nvPr/>
+        </p:nvSpPr>
+        <p:spPr>
+          <a:xfrm>
+            <a:off x="3383280" y="1508760"/>
+            <a:ext cx="2651760" cy="3886200"/>
+          </a:xfrm>
+          <a:prstGeom prst="roundRect">
+            <a:avLst>
+              <a:gd name="adj" fmla="val 4000"/>
+            </a:avLst>
+          </a:prstGeom>
+          <a:solidFill>
+            <a:srgbClr val="FFF4D6"/>
+          </a:solidFill>
+          <a:ln w="12700">
+            <a:solidFill>
+              <a:srgbClr val="F2A900"/>
+            </a:solidFill>
+          </a:ln>
+          <a:effectLst/>
+        </p:spPr>
+        <p:style>
+          <a:lnRef idx="1">
+            <a:schemeClr val="accent1"/>
+          </a:lnRef>
+          <a:fillRef idx="3">
+            <a:schemeClr val="accent1"/>
+          </a:fillRef>
+          <a:effectRef idx="2">
+            <a:schemeClr val="accent1"/>
+          </a:effectRef>
+          <a:fontRef idx="minor">
+            <a:schemeClr val="lt1"/>
+          </a:fontRef>
+        </p:style>
+        <p:txBody>
+          <a:bodyPr rtlCol="0" anchor="ctr"/>
+          <a:lstStyle/>
+          <a:p>
+            <a:pPr algn="ctr"/>
+          </a:p>
+        </p:txBody>
+      </p:sp>
+      <p:pic>
+        <p:nvPicPr>
+          <p:cNvPr id="14" name="Picture 13" descr="map_seg2.png"/>
+          <p:cNvPicPr>
+            <a:picLocks noChangeAspect="1"/>
+          </p:cNvPicPr>
+          <p:nvPr/>
+        </p:nvPicPr>
+        <p:blipFill>
+          <a:blip r:embed="rId3"/>
+          <a:stretch>
+            <a:fillRect/>
+          </a:stretch>
+        </p:blipFill>
+        <p:spPr>
+          <a:xfrm>
+            <a:off x="3474720" y="1600200"/>
+            <a:ext cx="2468879" cy="1851659"/>
+          </a:xfrm>
+          <a:prstGeom prst="rect">
+            <a:avLst/>
+          </a:prstGeom>
+        </p:spPr>
+      </p:pic>
+      <p:sp>
+        <p:nvSpPr>
+          <p:cNvPr id="15" name="badge_2"/>
+          <p:cNvSpPr/>
+          <p:nvPr/>
+        </p:nvSpPr>
+        <p:spPr>
+          <a:xfrm>
+            <a:off x="3547872" y="1691640"/>
+            <a:ext cx="384048" cy="384048"/>
+          </a:xfrm>
+          <a:prstGeom prst="ellipse">
+            <a:avLst/>
+          </a:prstGeom>
+          <a:solidFill>
             <a:srgbClr val="F2A900"/>
           </a:solidFill>
           <a:ln>
@@ -5951,20 +6419,103 @@
                 <a:ea typeface="Apple SD Gothic Neo"/>
                 <a:cs typeface="Apple SD Gothic Neo"/>
               </a:rPr>
-              <a:t>1</a:t>
-            </a:r>
-          </a:p>
-        </p:txBody>
-      </p:sp>
-      <p:sp>
-        <p:nvSpPr>
-          <p:cNvPr id="7" name="TextBox 6"/>
+              <a:t>2</a:t>
+            </a:r>
+          </a:p>
+        </p:txBody>
+      </p:sp>
+      <p:sp>
+        <p:nvSpPr>
+          <p:cNvPr id="16" name="prio_2"/>
+          <p:cNvSpPr/>
+          <p:nvPr/>
+        </p:nvSpPr>
+        <p:spPr>
+          <a:xfrm>
+            <a:off x="5166359" y="1719072"/>
+            <a:ext cx="685800" cy="329184"/>
+          </a:xfrm>
+          <a:prstGeom prst="roundRect">
+            <a:avLst>
+              <a:gd name="adj" fmla="val 30000"/>
+            </a:avLst>
+          </a:prstGeom>
+          <a:solidFill>
+            <a:srgbClr val="F2A900"/>
+          </a:solidFill>
+          <a:ln>
+            <a:noFill/>
+          </a:ln>
+          <a:effectLst/>
+        </p:spPr>
+        <p:style>
+          <a:lnRef idx="1">
+            <a:schemeClr val="accent1"/>
+          </a:lnRef>
+          <a:fillRef idx="3">
+            <a:schemeClr val="accent1"/>
+          </a:fillRef>
+          <a:effectRef idx="2">
+            <a:schemeClr val="accent1"/>
+          </a:effectRef>
+          <a:fontRef idx="minor">
+            <a:schemeClr val="lt1"/>
+          </a:fontRef>
+        </p:style>
+        <p:txBody>
+          <a:bodyPr rtlCol="0" anchor="ctr"/>
+          <a:lstStyle/>
+          <a:p>
+            <a:pPr algn="ctr"/>
+          </a:p>
+        </p:txBody>
+      </p:sp>
+      <p:sp>
+        <p:nvSpPr>
+          <p:cNvPr id="17" name="TextBox 16"/>
           <p:cNvSpPr txBox="1"/>
           <p:nvPr/>
         </p:nvSpPr>
         <p:spPr>
           <a:xfrm>
-            <a:off x="685800" y="3543300"/>
+            <a:off x="5166359" y="1719072"/>
+            <a:ext cx="685800" cy="329184"/>
+          </a:xfrm>
+          <a:prstGeom prst="rect">
+            <a:avLst/>
+          </a:prstGeom>
+          <a:noFill/>
+        </p:spPr>
+        <p:txBody>
+          <a:bodyPr wrap="square" anchor="ctr" lIns="0" rIns="0" tIns="0" bIns="0">
+            <a:spAutoFit/>
+          </a:bodyPr>
+          <a:lstStyle/>
+          <a:p>
+            <a:pPr algn="ctr"/>
+            <a:r>
+              <a:rPr sz="1200" b="1" i="0">
+                <a:solidFill>
+                  <a:srgbClr val="1F2328"/>
+                </a:solidFill>
+                <a:latin typeface="Apple SD Gothic Neo"/>
+                <a:ea typeface="Apple SD Gothic Neo"/>
+                <a:cs typeface="Apple SD Gothic Neo"/>
+              </a:rPr>
+              <a:t>핵심</a:t>
+            </a:r>
+          </a:p>
+        </p:txBody>
+      </p:sp>
+      <p:sp>
+        <p:nvSpPr>
+          <p:cNvPr id="18" name="TextBox 17"/>
+          <p:cNvSpPr txBox="1"/>
+          <p:nvPr/>
+        </p:nvSpPr>
+        <p:spPr>
+          <a:xfrm>
+            <a:off x="3520440" y="3543300"/>
             <a:ext cx="2377440" cy="411480"/>
           </a:xfrm>
           <a:prstGeom prst="rect">
@@ -5988,7 +6539,7 @@
                 <a:ea typeface="Apple SD Gothic Neo"/>
                 <a:cs typeface="Apple SD Gothic Neo"/>
               </a:rPr>
-              <a:t>출발</a:t>
+              <a:t>분기</a:t>
             </a:r>
             <a:r>
               <a:rPr sz="1400" b="0" i="0">
@@ -5999,20 +6550,20 @@
                 <a:ea typeface="Apple SD Gothic Neo"/>
                 <a:cs typeface="Apple SD Gothic Neo"/>
               </a:rPr>
-              <a:t>  6.2 km</a:t>
-            </a:r>
-          </a:p>
-        </p:txBody>
-      </p:sp>
-      <p:sp>
-        <p:nvSpPr>
-          <p:cNvPr id="8" name="TextBox 7"/>
+              <a:t>  4.8 km</a:t>
+            </a:r>
+          </a:p>
+        </p:txBody>
+      </p:sp>
+      <p:sp>
+        <p:nvSpPr>
+          <p:cNvPr id="19" name="TextBox 18"/>
           <p:cNvSpPr txBox="1"/>
           <p:nvPr/>
         </p:nvSpPr>
         <p:spPr>
           <a:xfrm>
-            <a:off x="685800" y="3927348"/>
+            <a:off x="3520440" y="3927348"/>
             <a:ext cx="2377440" cy="548640"/>
           </a:xfrm>
           <a:prstGeom prst="rect">
@@ -6036,21 +6587,21 @@
                 <a:ea typeface="Apple SD Gothic Neo"/>
                 <a:cs typeface="Apple SD Gothic Neo"/>
               </a:rPr>
-              <a:t>캠퍼스 → 수인로 → 수원문산고속도로</a:t>
-            </a:r>
-          </a:p>
-        </p:txBody>
-      </p:sp>
-      <p:sp>
-        <p:nvSpPr>
-          <p:cNvPr id="9" name="TextBox 8"/>
+              <a:t>수원문산고속도로 → 서부간선도로 → 지하도로</a:t>
+            </a:r>
+          </a:p>
+        </p:txBody>
+      </p:sp>
+      <p:sp>
+        <p:nvSpPr>
+          <p:cNvPr id="20" name="TextBox 19"/>
           <p:cNvSpPr txBox="1"/>
           <p:nvPr/>
         </p:nvSpPr>
         <p:spPr>
           <a:xfrm>
-            <a:off x="685800" y="4475988"/>
-            <a:ext cx="2377440" cy="640080"/>
+            <a:off x="3520440" y="4457700"/>
+            <a:ext cx="2377440" cy="566928"/>
           </a:xfrm>
           <a:prstGeom prst="rect">
             <a:avLst/>
@@ -6073,7 +6624,7 @@
                 <a:ea typeface="Apple SD Gothic Neo"/>
                 <a:cs typeface="Apple SD Gothic Neo"/>
               </a:rPr>
-              <a:t>· 신호 교차로</a:t>
+              <a:t>· 지상·지하 갈림길</a:t>
             </a:r>
           </a:p>
           <a:p>
@@ -6087,21 +6638,58 @@
                 <a:ea typeface="Apple SD Gothic Neo"/>
                 <a:cs typeface="Apple SD Gothic Neo"/>
               </a:rPr>
-              <a:t>· 진입 램프 합류</a:t>
-            </a:r>
-          </a:p>
-        </p:txBody>
-      </p:sp>
-      <p:sp>
-        <p:nvSpPr>
-          <p:cNvPr id="10" name="seg_card_2"/>
+              <a:t>· 차로 감소 4 → 2+2</a:t>
+            </a:r>
+          </a:p>
+        </p:txBody>
+      </p:sp>
+      <p:sp>
+        <p:nvSpPr>
+          <p:cNvPr id="21" name="TextBox 20"/>
+          <p:cNvSpPr txBox="1"/>
+          <p:nvPr/>
+        </p:nvSpPr>
+        <p:spPr>
+          <a:xfrm>
+            <a:off x="3520440" y="5024628"/>
+            <a:ext cx="2377440" cy="320040"/>
+          </a:xfrm>
+          <a:prstGeom prst="rect">
+            <a:avLst/>
+          </a:prstGeom>
+          <a:noFill/>
+        </p:spPr>
+        <p:txBody>
+          <a:bodyPr wrap="square" anchor="t" lIns="0" rIns="0" tIns="0" bIns="0">
+            <a:spAutoFit/>
+          </a:bodyPr>
+          <a:lstStyle/>
+          <a:p>
+            <a:pPr algn="l"/>
+            <a:r>
+              <a:rPr sz="1200" b="1" i="0">
+                <a:solidFill>
+                  <a:srgbClr val="F2A900"/>
+                </a:solidFill>
+                <a:latin typeface="Apple SD Gothic Neo"/>
+                <a:ea typeface="Apple SD Gothic Neo"/>
+                <a:cs typeface="Apple SD Gothic Neo"/>
+              </a:rPr>
+              <a:t>SUMO 변환 완료</a:t>
+            </a:r>
+          </a:p>
+        </p:txBody>
+      </p:sp>
+      <p:sp>
+        <p:nvSpPr>
+          <p:cNvPr id="22" name="seg_card_3"/>
           <p:cNvSpPr/>
           <p:nvPr/>
         </p:nvSpPr>
         <p:spPr>
           <a:xfrm>
-            <a:off x="3383280" y="1508760"/>
-            <a:ext cx="2651760" cy="3840480"/>
+            <a:off x="6217920" y="1508760"/>
+            <a:ext cx="2651760" cy="3886200"/>
           </a:xfrm>
           <a:prstGeom prst="roundRect">
             <a:avLst>
@@ -6140,21 +6728,21 @@
       </p:sp>
       <p:pic>
         <p:nvPicPr>
-          <p:cNvPr id="11" name="Picture 10" descr="map_seg2.png"/>
+          <p:cNvPr id="23" name="Picture 22" descr="map_seg3.png"/>
           <p:cNvPicPr>
             <a:picLocks noChangeAspect="1"/>
           </p:cNvPicPr>
           <p:nvPr/>
         </p:nvPicPr>
         <p:blipFill>
-          <a:blip r:embed="rId3"/>
+          <a:blip r:embed="rId4"/>
           <a:stretch>
             <a:fillRect/>
           </a:stretch>
         </p:blipFill>
         <p:spPr>
           <a:xfrm>
-            <a:off x="3474720" y="1600200"/>
+            <a:off x="6309359" y="1600200"/>
             <a:ext cx="2468879" cy="1851659"/>
           </a:xfrm>
           <a:prstGeom prst="rect">
@@ -6164,13 +6752,396 @@
       </p:pic>
       <p:sp>
         <p:nvSpPr>
-          <p:cNvPr id="12" name="badge_2"/>
+          <p:cNvPr id="24" name="badge_3"/>
           <p:cNvSpPr/>
           <p:nvPr/>
         </p:nvSpPr>
         <p:spPr>
           <a:xfrm>
-            <a:off x="3547872" y="1691640"/>
+            <a:off x="6382512" y="1691640"/>
+            <a:ext cx="384048" cy="384048"/>
+          </a:xfrm>
+          <a:prstGeom prst="ellipse">
+            <a:avLst/>
+          </a:prstGeom>
+          <a:solidFill>
+            <a:srgbClr val="8A939E"/>
+          </a:solidFill>
+          <a:ln>
+            <a:noFill/>
+          </a:ln>
+          <a:effectLst/>
+        </p:spPr>
+        <p:style>
+          <a:lnRef idx="1">
+            <a:schemeClr val="accent1"/>
+          </a:lnRef>
+          <a:fillRef idx="3">
+            <a:schemeClr val="accent1"/>
+          </a:fillRef>
+          <a:effectRef idx="2">
+            <a:schemeClr val="accent1"/>
+          </a:effectRef>
+          <a:fontRef idx="minor">
+            <a:schemeClr val="lt1"/>
+          </a:fontRef>
+        </p:style>
+        <p:txBody>
+          <a:bodyPr rtlCol="0" anchor="ctr" lIns="0" rIns="0" tIns="0" bIns="0"/>
+          <a:lstStyle/>
+          <a:p>
+            <a:pPr algn="ctr"/>
+            <a:r>
+              <a:rPr sz="1500" b="1" i="0">
+                <a:solidFill>
+                  <a:srgbClr val="FFFFFF"/>
+                </a:solidFill>
+                <a:latin typeface="Apple SD Gothic Neo"/>
+                <a:ea typeface="Apple SD Gothic Neo"/>
+                <a:cs typeface="Apple SD Gothic Neo"/>
+              </a:rPr>
+              <a:t>3</a:t>
+            </a:r>
+          </a:p>
+        </p:txBody>
+      </p:sp>
+      <p:sp>
+        <p:nvSpPr>
+          <p:cNvPr id="25" name="prio_3"/>
+          <p:cNvSpPr/>
+          <p:nvPr/>
+        </p:nvSpPr>
+        <p:spPr>
+          <a:xfrm>
+            <a:off x="8001000" y="1719072"/>
+            <a:ext cx="685800" cy="329184"/>
+          </a:xfrm>
+          <a:prstGeom prst="roundRect">
+            <a:avLst>
+              <a:gd name="adj" fmla="val 30000"/>
+            </a:avLst>
+          </a:prstGeom>
+          <a:solidFill>
+            <a:srgbClr val="8A939E"/>
+          </a:solidFill>
+          <a:ln>
+            <a:noFill/>
+          </a:ln>
+          <a:effectLst/>
+        </p:spPr>
+        <p:style>
+          <a:lnRef idx="1">
+            <a:schemeClr val="accent1"/>
+          </a:lnRef>
+          <a:fillRef idx="3">
+            <a:schemeClr val="accent1"/>
+          </a:fillRef>
+          <a:effectRef idx="2">
+            <a:schemeClr val="accent1"/>
+          </a:effectRef>
+          <a:fontRef idx="minor">
+            <a:schemeClr val="lt1"/>
+          </a:fontRef>
+        </p:style>
+        <p:txBody>
+          <a:bodyPr rtlCol="0" anchor="ctr"/>
+          <a:lstStyle/>
+          <a:p>
+            <a:pPr algn="ctr"/>
+          </a:p>
+        </p:txBody>
+      </p:sp>
+      <p:sp>
+        <p:nvSpPr>
+          <p:cNvPr id="26" name="TextBox 25"/>
+          <p:cNvSpPr txBox="1"/>
+          <p:nvPr/>
+        </p:nvSpPr>
+        <p:spPr>
+          <a:xfrm>
+            <a:off x="8001000" y="1719072"/>
+            <a:ext cx="685800" cy="329184"/>
+          </a:xfrm>
+          <a:prstGeom prst="rect">
+            <a:avLst/>
+          </a:prstGeom>
+          <a:noFill/>
+        </p:spPr>
+        <p:txBody>
+          <a:bodyPr wrap="square" anchor="ctr" lIns="0" rIns="0" tIns="0" bIns="0">
+            <a:spAutoFit/>
+          </a:bodyPr>
+          <a:lstStyle/>
+          <a:p>
+            <a:pPr algn="ctr"/>
+            <a:r>
+              <a:rPr sz="1200" b="1" i="0">
+                <a:solidFill>
+                  <a:srgbClr val="FFFFFF"/>
+                </a:solidFill>
+                <a:latin typeface="Apple SD Gothic Neo"/>
+                <a:ea typeface="Apple SD Gothic Neo"/>
+                <a:cs typeface="Apple SD Gothic Neo"/>
+              </a:rPr>
+              <a:t>확장</a:t>
+            </a:r>
+          </a:p>
+        </p:txBody>
+      </p:sp>
+      <p:sp>
+        <p:nvSpPr>
+          <p:cNvPr id="27" name="TextBox 26"/>
+          <p:cNvSpPr txBox="1"/>
+          <p:nvPr/>
+        </p:nvSpPr>
+        <p:spPr>
+          <a:xfrm>
+            <a:off x="6355080" y="3543300"/>
+            <a:ext cx="2377440" cy="411480"/>
+          </a:xfrm>
+          <a:prstGeom prst="rect">
+            <a:avLst/>
+          </a:prstGeom>
+          <a:noFill/>
+        </p:spPr>
+        <p:txBody>
+          <a:bodyPr wrap="square" anchor="t" lIns="0" rIns="0" tIns="0" bIns="0">
+            <a:spAutoFit/>
+          </a:bodyPr>
+          <a:lstStyle/>
+          <a:p>
+            <a:pPr algn="l"/>
+            <a:r>
+              <a:rPr sz="1700" b="1" i="0">
+                <a:solidFill>
+                  <a:srgbClr val="1F2328"/>
+                </a:solidFill>
+                <a:latin typeface="Apple SD Gothic Neo"/>
+                <a:ea typeface="Apple SD Gothic Neo"/>
+                <a:cs typeface="Apple SD Gothic Neo"/>
+              </a:rPr>
+              <a:t>한강</a:t>
+            </a:r>
+            <a:r>
+              <a:rPr sz="1400" b="0" i="0">
+                <a:solidFill>
+                  <a:srgbClr val="5B636E"/>
+                </a:solidFill>
+                <a:latin typeface="Apple SD Gothic Neo"/>
+                <a:ea typeface="Apple SD Gothic Neo"/>
+                <a:cs typeface="Apple SD Gothic Neo"/>
+              </a:rPr>
+              <a:t>  7.5 km</a:t>
+            </a:r>
+          </a:p>
+        </p:txBody>
+      </p:sp>
+      <p:sp>
+        <p:nvSpPr>
+          <p:cNvPr id="28" name="TextBox 27"/>
+          <p:cNvSpPr txBox="1"/>
+          <p:nvPr/>
+        </p:nvSpPr>
+        <p:spPr>
+          <a:xfrm>
+            <a:off x="6355080" y="3927348"/>
+            <a:ext cx="2377440" cy="548640"/>
+          </a:xfrm>
+          <a:prstGeom prst="rect">
+            <a:avLst/>
+          </a:prstGeom>
+          <a:noFill/>
+        </p:spPr>
+        <p:txBody>
+          <a:bodyPr wrap="square" anchor="t" lIns="0" rIns="0" tIns="0" bIns="0">
+            <a:spAutoFit/>
+          </a:bodyPr>
+          <a:lstStyle/>
+          <a:p>
+            <a:pPr algn="l"/>
+            <a:r>
+              <a:rPr sz="1200" b="0" i="0">
+                <a:solidFill>
+                  <a:srgbClr val="5B636E"/>
+                </a:solidFill>
+                <a:latin typeface="Apple SD Gothic Neo"/>
+                <a:ea typeface="Apple SD Gothic Neo"/>
+                <a:cs typeface="Apple SD Gothic Neo"/>
+              </a:rPr>
+              <a:t>서부간선로 → 성산대교 → 강변북로 → 자유로</a:t>
+            </a:r>
+          </a:p>
+        </p:txBody>
+      </p:sp>
+      <p:sp>
+        <p:nvSpPr>
+          <p:cNvPr id="29" name="TextBox 28"/>
+          <p:cNvSpPr txBox="1"/>
+          <p:nvPr/>
+        </p:nvSpPr>
+        <p:spPr>
+          <a:xfrm>
+            <a:off x="6355080" y="4457700"/>
+            <a:ext cx="2377440" cy="566928"/>
+          </a:xfrm>
+          <a:prstGeom prst="rect">
+            <a:avLst/>
+          </a:prstGeom>
+          <a:noFill/>
+        </p:spPr>
+        <p:txBody>
+          <a:bodyPr wrap="square" anchor="t" lIns="0" rIns="0" tIns="0" bIns="0">
+            <a:spAutoFit/>
+          </a:bodyPr>
+          <a:lstStyle/>
+          <a:p>
+            <a:pPr algn="l"/>
+            <a:r>
+              <a:rPr sz="1300" b="1" i="0">
+                <a:solidFill>
+                  <a:srgbClr val="0B6E4F"/>
+                </a:solidFill>
+                <a:latin typeface="Apple SD Gothic Neo"/>
+                <a:ea typeface="Apple SD Gothic Neo"/>
+                <a:cs typeface="Apple SD Gothic Neo"/>
+              </a:rPr>
+              <a:t>· 한강 횡단</a:t>
+            </a:r>
+          </a:p>
+          <a:p>
+            <a:pPr algn="l"/>
+            <a:r>
+              <a:rPr sz="1300" b="1" i="0">
+                <a:solidFill>
+                  <a:srgbClr val="0B6E4F"/>
+                </a:solidFill>
+                <a:latin typeface="Apple SD Gothic Neo"/>
+                <a:ea typeface="Apple SD Gothic Neo"/>
+                <a:cs typeface="Apple SD Gothic Neo"/>
+              </a:rPr>
+              <a:t>· 합류·진출 엇갈림</a:t>
+            </a:r>
+          </a:p>
+        </p:txBody>
+      </p:sp>
+      <p:sp>
+        <p:nvSpPr>
+          <p:cNvPr id="30" name="TextBox 29"/>
+          <p:cNvSpPr txBox="1"/>
+          <p:nvPr/>
+        </p:nvSpPr>
+        <p:spPr>
+          <a:xfrm>
+            <a:off x="6355080" y="5024628"/>
+            <a:ext cx="2377440" cy="320040"/>
+          </a:xfrm>
+          <a:prstGeom prst="rect">
+            <a:avLst/>
+          </a:prstGeom>
+          <a:noFill/>
+        </p:spPr>
+        <p:txBody>
+          <a:bodyPr wrap="square" anchor="t" lIns="0" rIns="0" tIns="0" bIns="0">
+            <a:spAutoFit/>
+          </a:bodyPr>
+          <a:lstStyle/>
+          <a:p>
+            <a:pPr algn="l"/>
+            <a:r>
+              <a:rPr sz="1200" b="1" i="0">
+                <a:solidFill>
+                  <a:srgbClr val="5B636E"/>
+                </a:solidFill>
+                <a:latin typeface="Apple SD Gothic Neo"/>
+                <a:ea typeface="Apple SD Gothic Neo"/>
+                <a:cs typeface="Apple SD Gothic Neo"/>
+              </a:rPr>
+              <a:t>지도 정보 64%</a:t>
+            </a:r>
+          </a:p>
+        </p:txBody>
+      </p:sp>
+      <p:sp>
+        <p:nvSpPr>
+          <p:cNvPr id="31" name="seg_card_4"/>
+          <p:cNvSpPr/>
+          <p:nvPr/>
+        </p:nvSpPr>
+        <p:spPr>
+          <a:xfrm>
+            <a:off x="9052560" y="1508760"/>
+            <a:ext cx="2651760" cy="3886200"/>
+          </a:xfrm>
+          <a:prstGeom prst="roundRect">
+            <a:avLst>
+              <a:gd name="adj" fmla="val 4000"/>
+            </a:avLst>
+          </a:prstGeom>
+          <a:solidFill>
+            <a:srgbClr val="FFF4D6"/>
+          </a:solidFill>
+          <a:ln w="12700">
+            <a:solidFill>
+              <a:srgbClr val="F2A900"/>
+            </a:solidFill>
+          </a:ln>
+          <a:effectLst/>
+        </p:spPr>
+        <p:style>
+          <a:lnRef idx="1">
+            <a:schemeClr val="accent1"/>
+          </a:lnRef>
+          <a:fillRef idx="3">
+            <a:schemeClr val="accent1"/>
+          </a:fillRef>
+          <a:effectRef idx="2">
+            <a:schemeClr val="accent1"/>
+          </a:effectRef>
+          <a:fontRef idx="minor">
+            <a:schemeClr val="lt1"/>
+          </a:fontRef>
+        </p:style>
+        <p:txBody>
+          <a:bodyPr rtlCol="0" anchor="ctr"/>
+          <a:lstStyle/>
+          <a:p>
+            <a:pPr algn="ctr"/>
+          </a:p>
+        </p:txBody>
+      </p:sp>
+      <p:pic>
+        <p:nvPicPr>
+          <p:cNvPr id="32" name="Picture 31" descr="map_seg4.png"/>
+          <p:cNvPicPr>
+            <a:picLocks noChangeAspect="1"/>
+          </p:cNvPicPr>
+          <p:nvPr/>
+        </p:nvPicPr>
+        <p:blipFill>
+          <a:blip r:embed="rId5"/>
+          <a:stretch>
+            <a:fillRect/>
+          </a:stretch>
+        </p:blipFill>
+        <p:spPr>
+          <a:xfrm>
+            <a:off x="9144000" y="1600200"/>
+            <a:ext cx="2468879" cy="1851659"/>
+          </a:xfrm>
+          <a:prstGeom prst="rect">
+            <a:avLst/>
+          </a:prstGeom>
+        </p:spPr>
+      </p:pic>
+      <p:sp>
+        <p:nvSpPr>
+          <p:cNvPr id="33" name="badge_4"/>
+          <p:cNvSpPr/>
+          <p:nvPr/>
+        </p:nvSpPr>
+        <p:spPr>
+          <a:xfrm>
+            <a:off x="9217152" y="1691640"/>
             <a:ext cx="384048" cy="384048"/>
           </a:xfrm>
           <a:prstGeom prst="ellipse">
@@ -6212,230 +7183,26 @@
                 <a:ea typeface="Apple SD Gothic Neo"/>
                 <a:cs typeface="Apple SD Gothic Neo"/>
               </a:rPr>
-              <a:t>2</a:t>
-            </a:r>
-          </a:p>
-        </p:txBody>
-      </p:sp>
-      <p:sp>
-        <p:nvSpPr>
-          <p:cNvPr id="13" name="TextBox 12"/>
-          <p:cNvSpPr txBox="1"/>
-          <p:nvPr/>
-        </p:nvSpPr>
-        <p:spPr>
-          <a:xfrm>
-            <a:off x="3520440" y="3543300"/>
-            <a:ext cx="2377440" cy="411480"/>
-          </a:xfrm>
-          <a:prstGeom prst="rect">
-            <a:avLst/>
-          </a:prstGeom>
-          <a:noFill/>
-        </p:spPr>
-        <p:txBody>
-          <a:bodyPr wrap="square" anchor="t" lIns="0" rIns="0" tIns="0" bIns="0">
-            <a:spAutoFit/>
-          </a:bodyPr>
-          <a:lstStyle/>
-          <a:p>
-            <a:pPr algn="l"/>
-            <a:r>
-              <a:rPr sz="1700" b="1" i="0">
-                <a:solidFill>
-                  <a:srgbClr val="1F2328"/>
-                </a:solidFill>
-                <a:latin typeface="Apple SD Gothic Neo"/>
-                <a:ea typeface="Apple SD Gothic Neo"/>
-                <a:cs typeface="Apple SD Gothic Neo"/>
-              </a:rPr>
-              <a:t>분기</a:t>
-            </a:r>
-            <a:r>
-              <a:rPr sz="1400" b="0" i="0">
-                <a:solidFill>
-                  <a:srgbClr val="5B636E"/>
-                </a:solidFill>
-                <a:latin typeface="Apple SD Gothic Neo"/>
-                <a:ea typeface="Apple SD Gothic Neo"/>
-                <a:cs typeface="Apple SD Gothic Neo"/>
-              </a:rPr>
-              <a:t>  4.8 km</a:t>
-            </a:r>
-          </a:p>
-        </p:txBody>
-      </p:sp>
-      <p:sp>
-        <p:nvSpPr>
-          <p:cNvPr id="14" name="TextBox 13"/>
-          <p:cNvSpPr txBox="1"/>
-          <p:nvPr/>
-        </p:nvSpPr>
-        <p:spPr>
-          <a:xfrm>
-            <a:off x="3520440" y="3927348"/>
-            <a:ext cx="2377440" cy="548640"/>
-          </a:xfrm>
-          <a:prstGeom prst="rect">
-            <a:avLst/>
-          </a:prstGeom>
-          <a:noFill/>
-        </p:spPr>
-        <p:txBody>
-          <a:bodyPr wrap="square" anchor="t" lIns="0" rIns="0" tIns="0" bIns="0">
-            <a:spAutoFit/>
-          </a:bodyPr>
-          <a:lstStyle/>
-          <a:p>
-            <a:pPr algn="l"/>
-            <a:r>
-              <a:rPr sz="1200" b="0" i="0">
-                <a:solidFill>
-                  <a:srgbClr val="5B636E"/>
-                </a:solidFill>
-                <a:latin typeface="Apple SD Gothic Neo"/>
-                <a:ea typeface="Apple SD Gothic Neo"/>
-                <a:cs typeface="Apple SD Gothic Neo"/>
-              </a:rPr>
-              <a:t>수원문산고속도로 → 서부간선도로</a:t>
-            </a:r>
-          </a:p>
-        </p:txBody>
-      </p:sp>
-      <p:sp>
-        <p:nvSpPr>
-          <p:cNvPr id="15" name="TextBox 14"/>
-          <p:cNvSpPr txBox="1"/>
-          <p:nvPr/>
-        </p:nvSpPr>
-        <p:spPr>
-          <a:xfrm>
-            <a:off x="3520440" y="4475988"/>
-            <a:ext cx="2377440" cy="640080"/>
-          </a:xfrm>
-          <a:prstGeom prst="rect">
-            <a:avLst/>
-          </a:prstGeom>
-          <a:noFill/>
-        </p:spPr>
-        <p:txBody>
-          <a:bodyPr wrap="square" anchor="t" lIns="0" rIns="0" tIns="0" bIns="0">
-            <a:spAutoFit/>
-          </a:bodyPr>
-          <a:lstStyle/>
-          <a:p>
-            <a:pPr algn="l"/>
-            <a:r>
-              <a:rPr sz="1300" b="1" i="0">
-                <a:solidFill>
-                  <a:srgbClr val="0B6E4F"/>
-                </a:solidFill>
-                <a:latin typeface="Apple SD Gothic Neo"/>
-                <a:ea typeface="Apple SD Gothic Neo"/>
-                <a:cs typeface="Apple SD Gothic Neo"/>
-              </a:rPr>
-              <a:t>· 고속도로 간 연결</a:t>
-            </a:r>
-          </a:p>
-          <a:p>
-            <a:pPr algn="l"/>
-            <a:r>
-              <a:rPr sz="1300" b="1" i="0">
-                <a:solidFill>
-                  <a:srgbClr val="0B6E4F"/>
-                </a:solidFill>
-                <a:latin typeface="Apple SD Gothic Neo"/>
-                <a:ea typeface="Apple SD Gothic Neo"/>
-                <a:cs typeface="Apple SD Gothic Neo"/>
-              </a:rPr>
-              <a:t>· 지상·지하도로 갈림길</a:t>
-            </a:r>
-          </a:p>
-        </p:txBody>
-      </p:sp>
-      <p:sp>
-        <p:nvSpPr>
-          <p:cNvPr id="16" name="seg_card_3"/>
+              <a:t>4</a:t>
+            </a:r>
+          </a:p>
+        </p:txBody>
+      </p:sp>
+      <p:sp>
+        <p:nvSpPr>
+          <p:cNvPr id="34" name="prio_4"/>
           <p:cNvSpPr/>
           <p:nvPr/>
         </p:nvSpPr>
         <p:spPr>
           <a:xfrm>
-            <a:off x="6217920" y="1508760"/>
-            <a:ext cx="2651760" cy="3840480"/>
+            <a:off x="10835640" y="1719072"/>
+            <a:ext cx="685800" cy="329184"/>
           </a:xfrm>
           <a:prstGeom prst="roundRect">
             <a:avLst>
-              <a:gd name="adj" fmla="val 4000"/>
+              <a:gd name="adj" fmla="val 30000"/>
             </a:avLst>
-          </a:prstGeom>
-          <a:solidFill>
-            <a:srgbClr val="F1F3F5"/>
-          </a:solidFill>
-          <a:ln>
-            <a:noFill/>
-          </a:ln>
-          <a:effectLst/>
-        </p:spPr>
-        <p:style>
-          <a:lnRef idx="1">
-            <a:schemeClr val="accent1"/>
-          </a:lnRef>
-          <a:fillRef idx="3">
-            <a:schemeClr val="accent1"/>
-          </a:fillRef>
-          <a:effectRef idx="2">
-            <a:schemeClr val="accent1"/>
-          </a:effectRef>
-          <a:fontRef idx="minor">
-            <a:schemeClr val="lt1"/>
-          </a:fontRef>
-        </p:style>
-        <p:txBody>
-          <a:bodyPr rtlCol="0" anchor="ctr"/>
-          <a:lstStyle/>
-          <a:p>
-            <a:pPr algn="ctr"/>
-          </a:p>
-        </p:txBody>
-      </p:sp>
-      <p:pic>
-        <p:nvPicPr>
-          <p:cNvPr id="17" name="Picture 16" descr="map_seg3.png"/>
-          <p:cNvPicPr>
-            <a:picLocks noChangeAspect="1"/>
-          </p:cNvPicPr>
-          <p:nvPr/>
-        </p:nvPicPr>
-        <p:blipFill>
-          <a:blip r:embed="rId4"/>
-          <a:stretch>
-            <a:fillRect/>
-          </a:stretch>
-        </p:blipFill>
-        <p:spPr>
-          <a:xfrm>
-            <a:off x="6309359" y="1600200"/>
-            <a:ext cx="2468879" cy="1851659"/>
-          </a:xfrm>
-          <a:prstGeom prst="rect">
-            <a:avLst/>
-          </a:prstGeom>
-        </p:spPr>
-      </p:pic>
-      <p:sp>
-        <p:nvSpPr>
-          <p:cNvPr id="18" name="badge_3"/>
-          <p:cNvSpPr/>
-          <p:nvPr/>
-        </p:nvSpPr>
-        <p:spPr>
-          <a:xfrm>
-            <a:off x="6382512" y="1691640"/>
-            <a:ext cx="384048" cy="384048"/>
-          </a:xfrm>
-          <a:prstGeom prst="ellipse">
-            <a:avLst/>
           </a:prstGeom>
           <a:solidFill>
             <a:srgbClr val="F2A900"/>
@@ -6460,12 +7227,38 @@
           </a:fontRef>
         </p:style>
         <p:txBody>
-          <a:bodyPr rtlCol="0" anchor="ctr" lIns="0" rIns="0" tIns="0" bIns="0"/>
+          <a:bodyPr rtlCol="0" anchor="ctr"/>
           <a:lstStyle/>
           <a:p>
             <a:pPr algn="ctr"/>
-            <a:r>
-              <a:rPr sz="1500" b="1" i="0">
+          </a:p>
+        </p:txBody>
+      </p:sp>
+      <p:sp>
+        <p:nvSpPr>
+          <p:cNvPr id="35" name="TextBox 34"/>
+          <p:cNvSpPr txBox="1"/>
+          <p:nvPr/>
+        </p:nvSpPr>
+        <p:spPr>
+          <a:xfrm>
+            <a:off x="10835640" y="1719072"/>
+            <a:ext cx="685800" cy="329184"/>
+          </a:xfrm>
+          <a:prstGeom prst="rect">
+            <a:avLst/>
+          </a:prstGeom>
+          <a:noFill/>
+        </p:spPr>
+        <p:txBody>
+          <a:bodyPr wrap="square" anchor="ctr" lIns="0" rIns="0" tIns="0" bIns="0">
+            <a:spAutoFit/>
+          </a:bodyPr>
+          <a:lstStyle/>
+          <a:p>
+            <a:pPr algn="ctr"/>
+            <a:r>
+              <a:rPr sz="1200" b="1" i="0">
                 <a:solidFill>
                   <a:srgbClr val="1F2328"/>
                 </a:solidFill>
@@ -6473,20 +7266,20 @@
                 <a:ea typeface="Apple SD Gothic Neo"/>
                 <a:cs typeface="Apple SD Gothic Neo"/>
               </a:rPr>
-              <a:t>3</a:t>
-            </a:r>
-          </a:p>
-        </p:txBody>
-      </p:sp>
-      <p:sp>
-        <p:nvSpPr>
-          <p:cNvPr id="19" name="TextBox 18"/>
+              <a:t>핵심</a:t>
+            </a:r>
+          </a:p>
+        </p:txBody>
+      </p:sp>
+      <p:sp>
+        <p:nvSpPr>
+          <p:cNvPr id="36" name="TextBox 35"/>
           <p:cNvSpPr txBox="1"/>
           <p:nvPr/>
         </p:nvSpPr>
         <p:spPr>
           <a:xfrm>
-            <a:off x="6355080" y="3543300"/>
+            <a:off x="9189720" y="3543300"/>
             <a:ext cx="2377440" cy="411480"/>
           </a:xfrm>
           <a:prstGeom prst="rect">
@@ -6510,7 +7303,7 @@
                 <a:ea typeface="Apple SD Gothic Neo"/>
                 <a:cs typeface="Apple SD Gothic Neo"/>
               </a:rPr>
-              <a:t>한강</a:t>
+              <a:t>도착</a:t>
             </a:r>
             <a:r>
               <a:rPr sz="1400" b="0" i="0">
@@ -6521,20 +7314,20 @@
                 <a:ea typeface="Apple SD Gothic Neo"/>
                 <a:cs typeface="Apple SD Gothic Neo"/>
               </a:rPr>
-              <a:t>  7.5 km</a:t>
-            </a:r>
-          </a:p>
-        </p:txBody>
-      </p:sp>
-      <p:sp>
-        <p:nvSpPr>
-          <p:cNvPr id="20" name="TextBox 19"/>
+              <a:t>  3.6 km</a:t>
+            </a:r>
+          </a:p>
+        </p:txBody>
+      </p:sp>
+      <p:sp>
+        <p:nvSpPr>
+          <p:cNvPr id="37" name="TextBox 36"/>
           <p:cNvSpPr txBox="1"/>
           <p:nvPr/>
         </p:nvSpPr>
         <p:spPr>
           <a:xfrm>
-            <a:off x="6355080" y="3927348"/>
+            <a:off x="9189720" y="3927348"/>
             <a:ext cx="2377440" cy="548640"/>
           </a:xfrm>
           <a:prstGeom prst="rect">
@@ -6558,21 +7351,21 @@
                 <a:ea typeface="Apple SD Gothic Neo"/>
                 <a:cs typeface="Apple SD Gothic Neo"/>
               </a:rPr>
-              <a:t>서부간선로 → 성산대교 → 강변북로 → 자유로</a:t>
-            </a:r>
-          </a:p>
-        </p:txBody>
-      </p:sp>
-      <p:sp>
-        <p:nvSpPr>
-          <p:cNvPr id="21" name="TextBox 20"/>
+              <a:t>자유로 → 진출 램프 → 킨텍스로</a:t>
+            </a:r>
+          </a:p>
+        </p:txBody>
+      </p:sp>
+      <p:sp>
+        <p:nvSpPr>
+          <p:cNvPr id="38" name="TextBox 37"/>
           <p:cNvSpPr txBox="1"/>
           <p:nvPr/>
         </p:nvSpPr>
         <p:spPr>
           <a:xfrm>
-            <a:off x="6355080" y="4475988"/>
-            <a:ext cx="2377440" cy="640080"/>
+            <a:off x="9189720" y="4457700"/>
+            <a:ext cx="2377440" cy="566928"/>
           </a:xfrm>
           <a:prstGeom prst="rect">
             <a:avLst/>
@@ -6595,7 +7388,7 @@
                 <a:ea typeface="Apple SD Gothic Neo"/>
                 <a:cs typeface="Apple SD Gothic Neo"/>
               </a:rPr>
-              <a:t>· 한강 횡단</a:t>
+              <a:t>· 출구 차선 확보</a:t>
             </a:r>
           </a:p>
           <a:p>
@@ -6609,146 +7402,21 @@
                 <a:ea typeface="Apple SD Gothic Neo"/>
                 <a:cs typeface="Apple SD Gothic Neo"/>
               </a:rPr>
-              <a:t>· 합류·진출 엇갈림</a:t>
-            </a:r>
-          </a:p>
-        </p:txBody>
-      </p:sp>
-      <p:sp>
-        <p:nvSpPr>
-          <p:cNvPr id="22" name="seg_card_4"/>
-          <p:cNvSpPr/>
-          <p:nvPr/>
-        </p:nvSpPr>
-        <p:spPr>
-          <a:xfrm>
-            <a:off x="9052560" y="1508760"/>
-            <a:ext cx="2651760" cy="3840480"/>
-          </a:xfrm>
-          <a:prstGeom prst="roundRect">
-            <a:avLst>
-              <a:gd name="adj" fmla="val 4000"/>
-            </a:avLst>
-          </a:prstGeom>
-          <a:solidFill>
-            <a:srgbClr val="F1F3F5"/>
-          </a:solidFill>
-          <a:ln>
-            <a:noFill/>
-          </a:ln>
-          <a:effectLst/>
-        </p:spPr>
-        <p:style>
-          <a:lnRef idx="1">
-            <a:schemeClr val="accent1"/>
-          </a:lnRef>
-          <a:fillRef idx="3">
-            <a:schemeClr val="accent1"/>
-          </a:fillRef>
-          <a:effectRef idx="2">
-            <a:schemeClr val="accent1"/>
-          </a:effectRef>
-          <a:fontRef idx="minor">
-            <a:schemeClr val="lt1"/>
-          </a:fontRef>
-        </p:style>
-        <p:txBody>
-          <a:bodyPr rtlCol="0" anchor="ctr"/>
-          <a:lstStyle/>
-          <a:p>
-            <a:pPr algn="ctr"/>
-          </a:p>
-        </p:txBody>
-      </p:sp>
-      <p:pic>
-        <p:nvPicPr>
-          <p:cNvPr id="23" name="Picture 22" descr="map_seg4.png"/>
-          <p:cNvPicPr>
-            <a:picLocks noChangeAspect="1"/>
-          </p:cNvPicPr>
-          <p:nvPr/>
-        </p:nvPicPr>
-        <p:blipFill>
-          <a:blip r:embed="rId5"/>
-          <a:stretch>
-            <a:fillRect/>
-          </a:stretch>
-        </p:blipFill>
-        <p:spPr>
-          <a:xfrm>
-            <a:off x="9144000" y="1600200"/>
-            <a:ext cx="2468879" cy="1851659"/>
-          </a:xfrm>
-          <a:prstGeom prst="rect">
-            <a:avLst/>
-          </a:prstGeom>
-        </p:spPr>
-      </p:pic>
-      <p:sp>
-        <p:nvSpPr>
-          <p:cNvPr id="24" name="badge_4"/>
-          <p:cNvSpPr/>
-          <p:nvPr/>
-        </p:nvSpPr>
-        <p:spPr>
-          <a:xfrm>
-            <a:off x="9217152" y="1691640"/>
-            <a:ext cx="384048" cy="384048"/>
-          </a:xfrm>
-          <a:prstGeom prst="ellipse">
-            <a:avLst/>
-          </a:prstGeom>
-          <a:solidFill>
-            <a:srgbClr val="F2A900"/>
-          </a:solidFill>
-          <a:ln>
-            <a:noFill/>
-          </a:ln>
-          <a:effectLst/>
-        </p:spPr>
-        <p:style>
-          <a:lnRef idx="1">
-            <a:schemeClr val="accent1"/>
-          </a:lnRef>
-          <a:fillRef idx="3">
-            <a:schemeClr val="accent1"/>
-          </a:fillRef>
-          <a:effectRef idx="2">
-            <a:schemeClr val="accent1"/>
-          </a:effectRef>
-          <a:fontRef idx="minor">
-            <a:schemeClr val="lt1"/>
-          </a:fontRef>
-        </p:style>
-        <p:txBody>
-          <a:bodyPr rtlCol="0" anchor="ctr" lIns="0" rIns="0" tIns="0" bIns="0"/>
-          <a:lstStyle/>
-          <a:p>
-            <a:pPr algn="ctr"/>
-            <a:r>
-              <a:rPr sz="1500" b="1" i="0">
-                <a:solidFill>
-                  <a:srgbClr val="1F2328"/>
-                </a:solidFill>
-                <a:latin typeface="Apple SD Gothic Neo"/>
-                <a:ea typeface="Apple SD Gothic Neo"/>
-                <a:cs typeface="Apple SD Gothic Neo"/>
-              </a:rPr>
-              <a:t>4</a:t>
-            </a:r>
-          </a:p>
-        </p:txBody>
-      </p:sp>
-      <p:sp>
-        <p:nvSpPr>
-          <p:cNvPr id="25" name="TextBox 24"/>
+              <a:t>· 신호 교차로, 목적지</a:t>
+            </a:r>
+          </a:p>
+        </p:txBody>
+      </p:sp>
+      <p:sp>
+        <p:nvSpPr>
+          <p:cNvPr id="39" name="TextBox 38"/>
           <p:cNvSpPr txBox="1"/>
           <p:nvPr/>
         </p:nvSpPr>
         <p:spPr>
           <a:xfrm>
-            <a:off x="9189720" y="3543300"/>
-            <a:ext cx="2377440" cy="411480"/>
+            <a:off x="9189720" y="5024628"/>
+            <a:ext cx="2377440" cy="320040"/>
           </a:xfrm>
           <a:prstGeom prst="rect">
             <a:avLst/>
@@ -6763,18 +7431,7 @@
           <a:p>
             <a:pPr algn="l"/>
             <a:r>
-              <a:rPr sz="1700" b="1" i="0">
-                <a:solidFill>
-                  <a:srgbClr val="1F2328"/>
-                </a:solidFill>
-                <a:latin typeface="Apple SD Gothic Neo"/>
-                <a:ea typeface="Apple SD Gothic Neo"/>
-                <a:cs typeface="Apple SD Gothic Neo"/>
-              </a:rPr>
-              <a:t>도착</a:t>
-            </a:r>
-            <a:r>
-              <a:rPr sz="1400" b="0" i="0">
+              <a:rPr sz="1200" b="1" i="0">
                 <a:solidFill>
                   <a:srgbClr val="5B636E"/>
                 </a:solidFill>
@@ -6782,109 +7439,21 @@
                 <a:ea typeface="Apple SD Gothic Neo"/>
                 <a:cs typeface="Apple SD Gothic Neo"/>
               </a:rPr>
-              <a:t>  3.6 km</a:t>
-            </a:r>
-          </a:p>
-        </p:txBody>
-      </p:sp>
-      <p:sp>
-        <p:nvSpPr>
-          <p:cNvPr id="26" name="TextBox 25"/>
-          <p:cNvSpPr txBox="1"/>
-          <p:nvPr/>
-        </p:nvSpPr>
-        <p:spPr>
-          <a:xfrm>
-            <a:off x="9189720" y="3927348"/>
-            <a:ext cx="2377440" cy="548640"/>
-          </a:xfrm>
-          <a:prstGeom prst="rect">
-            <a:avLst/>
-          </a:prstGeom>
-          <a:noFill/>
-        </p:spPr>
-        <p:txBody>
-          <a:bodyPr wrap="square" anchor="t" lIns="0" rIns="0" tIns="0" bIns="0">
-            <a:spAutoFit/>
-          </a:bodyPr>
-          <a:lstStyle/>
-          <a:p>
-            <a:pPr algn="l"/>
-            <a:r>
-              <a:rPr sz="1200" b="0" i="0">
-                <a:solidFill>
-                  <a:srgbClr val="5B636E"/>
-                </a:solidFill>
-                <a:latin typeface="Apple SD Gothic Neo"/>
-                <a:ea typeface="Apple SD Gothic Neo"/>
-                <a:cs typeface="Apple SD Gothic Neo"/>
-              </a:rPr>
-              <a:t>자유로 → 진출 램프 → 킨텍스로</a:t>
-            </a:r>
-          </a:p>
-        </p:txBody>
-      </p:sp>
-      <p:sp>
-        <p:nvSpPr>
-          <p:cNvPr id="27" name="TextBox 26"/>
-          <p:cNvSpPr txBox="1"/>
-          <p:nvPr/>
-        </p:nvSpPr>
-        <p:spPr>
-          <a:xfrm>
-            <a:off x="9189720" y="4475988"/>
-            <a:ext cx="2377440" cy="640080"/>
-          </a:xfrm>
-          <a:prstGeom prst="rect">
-            <a:avLst/>
-          </a:prstGeom>
-          <a:noFill/>
-        </p:spPr>
-        <p:txBody>
-          <a:bodyPr wrap="square" anchor="t" lIns="0" rIns="0" tIns="0" bIns="0">
-            <a:spAutoFit/>
-          </a:bodyPr>
-          <a:lstStyle/>
-          <a:p>
-            <a:pPr algn="l"/>
-            <a:r>
-              <a:rPr sz="1300" b="1" i="0">
-                <a:solidFill>
-                  <a:srgbClr val="0B6E4F"/>
-                </a:solidFill>
-                <a:latin typeface="Apple SD Gothic Neo"/>
-                <a:ea typeface="Apple SD Gothic Neo"/>
-                <a:cs typeface="Apple SD Gothic Neo"/>
-              </a:rPr>
-              <a:t>· 출구 차선 확보</a:t>
-            </a:r>
-          </a:p>
-          <a:p>
-            <a:pPr algn="l"/>
-            <a:r>
-              <a:rPr sz="1300" b="1" i="0">
-                <a:solidFill>
-                  <a:srgbClr val="0B6E4F"/>
-                </a:solidFill>
-                <a:latin typeface="Apple SD Gothic Neo"/>
-                <a:ea typeface="Apple SD Gothic Neo"/>
-                <a:cs typeface="Apple SD Gothic Neo"/>
-              </a:rPr>
-              <a:t>· 도심 신호, 목적지</a:t>
-            </a:r>
-          </a:p>
-        </p:txBody>
-      </p:sp>
-      <p:sp>
-        <p:nvSpPr>
-          <p:cNvPr id="28" name="step_1"/>
+              <a:t>지도 정보 69%</a:t>
+            </a:r>
+          </a:p>
+        </p:txBody>
+      </p:sp>
+      <p:sp>
+        <p:nvSpPr>
+          <p:cNvPr id="40" name="step_1"/>
           <p:cNvSpPr/>
           <p:nvPr/>
         </p:nvSpPr>
         <p:spPr>
           <a:xfrm>
-            <a:off x="548640" y="5559552"/>
-            <a:ext cx="2011680" cy="777240"/>
+            <a:off x="548640" y="5596128"/>
+            <a:ext cx="1783080" cy="749808"/>
           </a:xfrm>
           <a:prstGeom prst="roundRect">
             <a:avLst>
@@ -6925,14 +7494,14 @@
       </p:sp>
       <p:sp>
         <p:nvSpPr>
-          <p:cNvPr id="29" name="TextBox 28"/>
+          <p:cNvPr id="41" name="TextBox 40"/>
           <p:cNvSpPr txBox="1"/>
           <p:nvPr/>
         </p:nvSpPr>
         <p:spPr>
           <a:xfrm>
-            <a:off x="548640" y="5559552"/>
-            <a:ext cx="2011680" cy="777240"/>
+            <a:off x="548640" y="5596128"/>
+            <a:ext cx="1783080" cy="749808"/>
           </a:xfrm>
           <a:prstGeom prst="rect">
             <a:avLst/>
@@ -6963,13 +7532,13 @@
       </p:sp>
       <p:sp>
         <p:nvSpPr>
-          <p:cNvPr id="30" name="Right Arrow 29"/>
+          <p:cNvPr id="42" name="Right Arrow 41"/>
           <p:cNvSpPr/>
           <p:nvPr/>
         </p:nvSpPr>
         <p:spPr>
           <a:xfrm>
-            <a:off x="2596896" y="5833872"/>
+            <a:off x="2359151" y="5852160"/>
             <a:ext cx="173736" cy="228600"/>
           </a:xfrm>
           <a:prstGeom prst="rightArrow">
@@ -7006,14 +7575,14 @@
       </p:sp>
       <p:sp>
         <p:nvSpPr>
-          <p:cNvPr id="31" name="step_2"/>
+          <p:cNvPr id="43" name="step_2"/>
           <p:cNvSpPr/>
           <p:nvPr/>
         </p:nvSpPr>
         <p:spPr>
           <a:xfrm>
-            <a:off x="2807208" y="5559552"/>
-            <a:ext cx="2011680" cy="777240"/>
+            <a:off x="2560320" y="5596128"/>
+            <a:ext cx="1783080" cy="749808"/>
           </a:xfrm>
           <a:prstGeom prst="roundRect">
             <a:avLst>
@@ -7054,14 +7623,14 @@
       </p:sp>
       <p:sp>
         <p:nvSpPr>
-          <p:cNvPr id="32" name="TextBox 31"/>
+          <p:cNvPr id="44" name="TextBox 43"/>
           <p:cNvSpPr txBox="1"/>
           <p:nvPr/>
         </p:nvSpPr>
         <p:spPr>
           <a:xfrm>
-            <a:off x="2807208" y="5559552"/>
-            <a:ext cx="2011680" cy="777240"/>
+            <a:off x="2560320" y="5596128"/>
+            <a:ext cx="1783080" cy="749808"/>
           </a:xfrm>
           <a:prstGeom prst="rect">
             <a:avLst/>
@@ -7092,13 +7661,13 @@
       </p:sp>
       <p:sp>
         <p:nvSpPr>
-          <p:cNvPr id="33" name="Right Arrow 32"/>
+          <p:cNvPr id="45" name="Right Arrow 44"/>
           <p:cNvSpPr/>
           <p:nvPr/>
         </p:nvSpPr>
         <p:spPr>
           <a:xfrm>
-            <a:off x="4855464" y="5833872"/>
+            <a:off x="4370832" y="5852160"/>
             <a:ext cx="173736" cy="228600"/>
           </a:xfrm>
           <a:prstGeom prst="rightArrow">
@@ -7135,14 +7704,14 @@
       </p:sp>
       <p:sp>
         <p:nvSpPr>
-          <p:cNvPr id="34" name="step_3"/>
+          <p:cNvPr id="46" name="step_3"/>
           <p:cNvSpPr/>
           <p:nvPr/>
         </p:nvSpPr>
         <p:spPr>
           <a:xfrm>
-            <a:off x="5065776" y="5559552"/>
-            <a:ext cx="2011680" cy="777240"/>
+            <a:off x="4572000" y="5596128"/>
+            <a:ext cx="1783080" cy="749808"/>
           </a:xfrm>
           <a:prstGeom prst="roundRect">
             <a:avLst>
@@ -7183,14 +7752,14 @@
       </p:sp>
       <p:sp>
         <p:nvSpPr>
-          <p:cNvPr id="35" name="TextBox 34"/>
+          <p:cNvPr id="47" name="TextBox 46"/>
           <p:cNvSpPr txBox="1"/>
           <p:nvPr/>
         </p:nvSpPr>
         <p:spPr>
           <a:xfrm>
-            <a:off x="5065776" y="5559552"/>
-            <a:ext cx="2011680" cy="777240"/>
+            <a:off x="4572000" y="5596128"/>
+            <a:ext cx="1783080" cy="749808"/>
           </a:xfrm>
           <a:prstGeom prst="rect">
             <a:avLst/>
@@ -7221,13 +7790,13 @@
       </p:sp>
       <p:sp>
         <p:nvSpPr>
-          <p:cNvPr id="36" name="Right Arrow 35"/>
+          <p:cNvPr id="48" name="Right Arrow 47"/>
           <p:cNvSpPr/>
           <p:nvPr/>
         </p:nvSpPr>
         <p:spPr>
           <a:xfrm>
-            <a:off x="7114032" y="5833872"/>
+            <a:off x="6382512" y="5852160"/>
             <a:ext cx="173736" cy="228600"/>
           </a:xfrm>
           <a:prstGeom prst="rightArrow">
@@ -7264,14 +7833,14 @@
       </p:sp>
       <p:sp>
         <p:nvSpPr>
-          <p:cNvPr id="37" name="step_4"/>
+          <p:cNvPr id="49" name="step_4"/>
           <p:cNvSpPr/>
           <p:nvPr/>
         </p:nvSpPr>
         <p:spPr>
           <a:xfrm>
-            <a:off x="7324344" y="5559552"/>
-            <a:ext cx="2011680" cy="777240"/>
+            <a:off x="6583680" y="5596128"/>
+            <a:ext cx="1783080" cy="749808"/>
           </a:xfrm>
           <a:prstGeom prst="roundRect">
             <a:avLst>
@@ -7312,14 +7881,14 @@
       </p:sp>
       <p:sp>
         <p:nvSpPr>
-          <p:cNvPr id="38" name="TextBox 37"/>
+          <p:cNvPr id="50" name="TextBox 49"/>
           <p:cNvSpPr txBox="1"/>
           <p:nvPr/>
         </p:nvSpPr>
         <p:spPr>
           <a:xfrm>
-            <a:off x="7324344" y="5559552"/>
-            <a:ext cx="2011680" cy="777240"/>
+            <a:off x="6583680" y="5596128"/>
+            <a:ext cx="1783080" cy="749808"/>
           </a:xfrm>
           <a:prstGeom prst="rect">
             <a:avLst/>
@@ -7350,24 +7919,27 @@
       </p:sp>
       <p:sp>
         <p:nvSpPr>
-          <p:cNvPr id="39" name="Right Arrow 38"/>
+          <p:cNvPr id="51" name="evidence"/>
           <p:cNvSpPr/>
           <p:nvPr/>
         </p:nvSpPr>
         <p:spPr>
           <a:xfrm>
-            <a:off x="9372600" y="5833872"/>
-            <a:ext cx="173736" cy="228600"/>
-          </a:xfrm>
-          <a:prstGeom prst="rightArrow">
-            <a:avLst/>
+            <a:off x="8686800" y="5596128"/>
+            <a:ext cx="2926079" cy="749808"/>
+          </a:xfrm>
+          <a:prstGeom prst="roundRect">
+            <a:avLst>
+              <a:gd name="adj" fmla="val 12000"/>
+            </a:avLst>
           </a:prstGeom>
           <a:solidFill>
-            <a:srgbClr val="F2A900"/>
+            <a:srgbClr val="E3F1EA"/>
           </a:solidFill>
           <a:ln>
             <a:noFill/>
           </a:ln>
+          <a:effectLst/>
         </p:spPr>
         <p:style>
           <a:lnRef idx="1">
@@ -7393,62 +7965,14 @@
       </p:sp>
       <p:sp>
         <p:nvSpPr>
-          <p:cNvPr id="40" name="step_5"/>
-          <p:cNvSpPr/>
-          <p:nvPr/>
-        </p:nvSpPr>
-        <p:spPr>
-          <a:xfrm>
-            <a:off x="9582912" y="5559552"/>
-            <a:ext cx="2011680" cy="777240"/>
-          </a:xfrm>
-          <a:prstGeom prst="roundRect">
-            <a:avLst>
-              <a:gd name="adj" fmla="val 12000"/>
-            </a:avLst>
-          </a:prstGeom>
-          <a:solidFill>
-            <a:srgbClr val="FFFFFF"/>
-          </a:solidFill>
-          <a:ln w="12700">
-            <a:solidFill>
-              <a:srgbClr val="D5DAE0"/>
-            </a:solidFill>
-          </a:ln>
-          <a:effectLst/>
-        </p:spPr>
-        <p:style>
-          <a:lnRef idx="1">
-            <a:schemeClr val="accent1"/>
-          </a:lnRef>
-          <a:fillRef idx="3">
-            <a:schemeClr val="accent1"/>
-          </a:fillRef>
-          <a:effectRef idx="2">
-            <a:schemeClr val="accent1"/>
-          </a:effectRef>
-          <a:fontRef idx="minor">
-            <a:schemeClr val="lt1"/>
-          </a:fontRef>
-        </p:style>
-        <p:txBody>
-          <a:bodyPr rtlCol="0" anchor="ctr"/>
-          <a:lstStyle/>
-          <a:p>
-            <a:pPr algn="ctr"/>
-          </a:p>
-        </p:txBody>
-      </p:sp>
-      <p:sp>
-        <p:nvSpPr>
-          <p:cNvPr id="41" name="TextBox 40"/>
+          <p:cNvPr id="52" name="TextBox 51"/>
           <p:cNvSpPr txBox="1"/>
           <p:nvPr/>
         </p:nvSpPr>
         <p:spPr>
           <a:xfrm>
-            <a:off x="9582912" y="5559552"/>
-            <a:ext cx="2011680" cy="777240"/>
+            <a:off x="8869680" y="5596128"/>
+            <a:ext cx="2651759" cy="749808"/>
           </a:xfrm>
           <a:prstGeom prst="rect">
             <a:avLst/>
@@ -7461,9 +7985,20 @@
           </a:bodyPr>
           <a:lstStyle/>
           <a:p>
-            <a:pPr algn="ctr"/>
-            <a:r>
-              <a:rPr sz="1300" b="1" i="0">
+            <a:pPr algn="l"/>
+            <a:r>
+              <a:rPr sz="1200" b="1" i="0">
+                <a:solidFill>
+                  <a:srgbClr val="0B6E4F"/>
+                </a:solidFill>
+                <a:latin typeface="Apple SD Gothic Neo"/>
+                <a:ea typeface="Apple SD Gothic Neo"/>
+                <a:cs typeface="Apple SD Gothic Neo"/>
+              </a:rPr>
+              <a:t>구간 2 시험  </a:t>
+            </a:r>
+            <a:r>
+              <a:rPr sz="1200" b="0" i="0">
                 <a:solidFill>
                   <a:srgbClr val="1F2328"/>
                 </a:solidFill>
@@ -7471,8 +8006,21 @@
                 <a:ea typeface="Apple SD Gothic Neo"/>
                 <a:cs typeface="Apple SD Gothic Neo"/>
               </a:rPr>
-              <a:t>전체 경로
-시연 영상</a:t>
+              <a:t>4.92 km 연결, 150대 완주</a:t>
+            </a:r>
+          </a:p>
+          <a:p>
+            <a:pPr algn="l"/>
+            <a:r>
+              <a:rPr sz="1200" b="0" i="0">
+                <a:solidFill>
+                  <a:srgbClr val="1F2328"/>
+                </a:solidFill>
+                <a:latin typeface="Apple SD Gothic Neo"/>
+                <a:ea typeface="Apple SD Gothic Neo"/>
+                <a:cs typeface="Apple SD Gothic Neo"/>
+              </a:rPr>
+              <a:t>정체 1곳 발견 → 신호 보정 예정</a:t>
             </a:r>
           </a:p>
         </p:txBody>
@@ -7758,7 +8306,7 @@
                 <a:ea typeface="Apple SD Gothic Neo"/>
                 <a:cs typeface="Apple SD Gothic Neo"/>
               </a:rPr>
-              <a:t>진입 램프 합류</a:t>
+              <a:t>분기 · 출구</a:t>
             </a:r>
           </a:p>
         </p:txBody>
@@ -7884,7 +8432,7 @@
                 <a:ea typeface="Apple SD Gothic Neo"/>
                 <a:cs typeface="Apple SD Gothic Neo"/>
               </a:rPr>
-              <a:t>본선 차량 사이 틈이 계속 바뀜</a:t>
+              <a:t>직진 차량 사이로 출구 차선에 들어가야 함</a:t>
             </a:r>
           </a:p>
         </p:txBody>
@@ -8010,7 +8558,7 @@
                 <a:ea typeface="Apple SD Gothic Neo"/>
                 <a:cs typeface="Apple SD Gothic Neo"/>
               </a:rPr>
-              <a:t>합류 시점과 속도</a:t>
+              <a:t>언제 옮길지 (늦으면 경로 이탈)</a:t>
             </a:r>
           </a:p>
         </p:txBody>
@@ -8093,7 +8641,7 @@
                 <a:ea typeface="Apple SD Gothic Neo"/>
                 <a:cs typeface="Apple SD Gothic Neo"/>
               </a:rPr>
-              <a:t>1</a:t>
+              <a:t>2·4</a:t>
             </a:r>
           </a:p>
         </p:txBody>
@@ -8176,7 +8724,7 @@
                 <a:ea typeface="Apple SD Gothic Neo"/>
                 <a:cs typeface="Apple SD Gothic Neo"/>
               </a:rPr>
-              <a:t>분기 · 출구</a:t>
+              <a:t>합류</a:t>
             </a:r>
           </a:p>
         </p:txBody>
@@ -8302,7 +8850,7 @@
                 <a:ea typeface="Apple SD Gothic Neo"/>
                 <a:cs typeface="Apple SD Gothic Neo"/>
               </a:rPr>
-              <a:t>직진 차량과 출구 차량이 차선을 엇갈림</a:t>
+              <a:t>합류 차량과 본선 차량</a:t>
             </a:r>
           </a:p>
         </p:txBody>
@@ -8428,7 +8976,7 @@
                 <a:ea typeface="Apple SD Gothic Neo"/>
                 <a:cs typeface="Apple SD Gothic Neo"/>
               </a:rPr>
-              <a:t>출구 차선으로 언제 옮길지</a:t>
+              <a:t>속도 맞추기, 양보 또는 진입</a:t>
             </a:r>
           </a:p>
         </p:txBody>
@@ -8511,7 +9059,7 @@
                 <a:ea typeface="Apple SD Gothic Neo"/>
                 <a:cs typeface="Apple SD Gothic Neo"/>
               </a:rPr>
-              <a:t>2·4</a:t>
+              <a:t>2·3</a:t>
             </a:r>
           </a:p>
         </p:txBody>
@@ -8594,7 +9142,7 @@
                 <a:ea typeface="Apple SD Gothic Neo"/>
                 <a:cs typeface="Apple SD Gothic Neo"/>
               </a:rPr>
-              <a:t>합류·진출 엇갈림</a:t>
+              <a:t>차로 감소</a:t>
             </a:r>
           </a:p>
         </p:txBody>
@@ -8720,7 +9268,7 @@
                 <a:ea typeface="Apple SD Gothic Neo"/>
                 <a:cs typeface="Apple SD Gothic Neo"/>
               </a:rPr>
-              <a:t>들어오는 차와 나가는 차가 짧은 구간에서 교차</a:t>
+              <a:t>4차선이 지하 2 + 지상 2로 갈림</a:t>
             </a:r>
           </a:p>
         </p:txBody>
@@ -8846,7 +9394,7 @@
                 <a:ea typeface="Apple SD Gothic Neo"/>
                 <a:cs typeface="Apple SD Gothic Neo"/>
               </a:rPr>
-              <a:t>양보할지, 틈으로 들어갈지</a:t>
+              <a:t>끊기는 차선에서 미리 빠지기</a:t>
             </a:r>
           </a:p>
         </p:txBody>
@@ -8929,7 +9477,7 @@
                 <a:ea typeface="Apple SD Gothic Neo"/>
                 <a:cs typeface="Apple SD Gothic Neo"/>
               </a:rPr>
-              <a:t>3</a:t>
+              <a:t>2</a:t>
             </a:r>
           </a:p>
         </p:txBody>
@@ -9347,7 +9895,7 @@
                 <a:ea typeface="Apple SD Gothic Neo"/>
                 <a:cs typeface="Apple SD Gothic Neo"/>
               </a:rPr>
-              <a:t>1·4</a:t>
+              <a:t>4·1</a:t>
             </a:r>
           </a:p>
         </p:txBody>
@@ -9813,7 +10361,7 @@
                 <a:ea typeface="Apple SD Gothic Neo"/>
                 <a:cs typeface="Apple SD Gothic Neo"/>
               </a:rPr>
-              <a:t>목표 출구까지 남은 거리 · 가야 할 차선 · 신호 상태와 정지선까지 거리</a:t>
+              <a:t>결정 지점까지 거리 · 지금 차선이 경로로 이어지는지 · 신호 상태</a:t>
             </a:r>
           </a:p>
         </p:txBody>
@@ -9905,22 +10453,342 @@
                 <a:ea typeface="Apple SD Gothic Neo"/>
                 <a:cs typeface="Apple SD Gothic Neo"/>
               </a:rPr>
-              <a:t>기본 수집 항목 전부 + 위치·속도 같은 절대 상태 + 경로 정보 추가</a:t>
+              <a:t>기본 항목은 그대로 두고, 평가 기준을 증명하는 항목만 이유와 함께 추가</a:t>
+            </a:r>
+          </a:p>
+        </p:txBody>
+      </p:sp>
+      <p:sp>
+        <p:nvSpPr>
+          <p:cNvPr id="4" name="base_card"/>
+          <p:cNvSpPr/>
+          <p:nvPr/>
+        </p:nvSpPr>
+        <p:spPr>
+          <a:xfrm>
+            <a:off x="548640" y="1481328"/>
+            <a:ext cx="3931920" cy="3840480"/>
+          </a:xfrm>
+          <a:prstGeom prst="roundRect">
+            <a:avLst>
+              <a:gd name="adj" fmla="val 4000"/>
+            </a:avLst>
+          </a:prstGeom>
+          <a:solidFill>
+            <a:srgbClr val="F1F3F5"/>
+          </a:solidFill>
+          <a:ln>
+            <a:noFill/>
+          </a:ln>
+          <a:effectLst/>
+        </p:spPr>
+        <p:style>
+          <a:lnRef idx="1">
+            <a:schemeClr val="accent1"/>
+          </a:lnRef>
+          <a:fillRef idx="3">
+            <a:schemeClr val="accent1"/>
+          </a:fillRef>
+          <a:effectRef idx="2">
+            <a:schemeClr val="accent1"/>
+          </a:effectRef>
+          <a:fontRef idx="minor">
+            <a:schemeClr val="lt1"/>
+          </a:fontRef>
+        </p:style>
+        <p:txBody>
+          <a:bodyPr rtlCol="0" anchor="ctr"/>
+          <a:lstStyle/>
+          <a:p>
+            <a:pPr algn="ctr"/>
+          </a:p>
+        </p:txBody>
+      </p:sp>
+      <p:sp>
+        <p:nvSpPr>
+          <p:cNvPr id="5" name="TextBox 4"/>
+          <p:cNvSpPr txBox="1"/>
+          <p:nvPr/>
+        </p:nvSpPr>
+        <p:spPr>
+          <a:xfrm>
+            <a:off x="777240" y="1600200"/>
+            <a:ext cx="3566160" cy="411480"/>
+          </a:xfrm>
+          <a:prstGeom prst="rect">
+            <a:avLst/>
+          </a:prstGeom>
+          <a:noFill/>
+        </p:spPr>
+        <p:txBody>
+          <a:bodyPr wrap="square" anchor="t" lIns="0" rIns="0" tIns="0" bIns="0">
+            <a:spAutoFit/>
+          </a:bodyPr>
+          <a:lstStyle/>
+          <a:p>
+            <a:pPr algn="l"/>
+            <a:r>
+              <a:rPr sz="1600" b="1" i="0">
+                <a:solidFill>
+                  <a:srgbClr val="1F2328"/>
+                </a:solidFill>
+                <a:latin typeface="Apple SD Gothic Neo"/>
+                <a:ea typeface="Apple SD Gothic Neo"/>
+                <a:cs typeface="Apple SD Gothic Neo"/>
+              </a:rPr>
+              <a:t>기본 항목 19개</a:t>
+            </a:r>
+            <a:r>
+              <a:rPr sz="1300" b="1" i="0">
+                <a:solidFill>
+                  <a:srgbClr val="0B6E4F"/>
+                </a:solidFill>
+                <a:latin typeface="Apple SD Gothic Neo"/>
+                <a:ea typeface="Apple SD Gothic Neo"/>
+                <a:cs typeface="Apple SD Gothic Neo"/>
+              </a:rPr>
+              <a:t>  변경 없음</a:t>
+            </a:r>
+          </a:p>
+        </p:txBody>
+      </p:sp>
+      <p:sp>
+        <p:nvSpPr>
+          <p:cNvPr id="6" name="TextBox 5"/>
+          <p:cNvSpPr txBox="1"/>
+          <p:nvPr/>
+        </p:nvSpPr>
+        <p:spPr>
+          <a:xfrm>
+            <a:off x="777240" y="2057400"/>
+            <a:ext cx="3566160" cy="3657600"/>
+          </a:xfrm>
+          <a:prstGeom prst="rect">
+            <a:avLst/>
+          </a:prstGeom>
+          <a:noFill/>
+        </p:spPr>
+        <p:txBody>
+          <a:bodyPr wrap="square" anchor="t" lIns="0" rIns="0" tIns="0" bIns="0">
+            <a:spAutoFit/>
+          </a:bodyPr>
+          <a:lstStyle/>
+          <a:p>
+            <a:pPr algn="l">
+              <a:spcAft>
+                <a:spcPts val="500"/>
+              </a:spcAft>
+            </a:pPr>
+            <a:r>
+              <a:rPr sz="1200" b="1" i="0">
+                <a:solidFill>
+                  <a:srgbClr val="0B6E4F"/>
+                </a:solidFill>
+                <a:latin typeface="Apple SD Gothic Neo"/>
+                <a:ea typeface="Apple SD Gothic Neo"/>
+                <a:cs typeface="Apple SD Gothic Neo"/>
+              </a:rPr>
+              <a:t>시간  </a:t>
+            </a:r>
+            <a:r>
+              <a:rPr sz="1200" b="0" i="0">
+                <a:solidFill>
+                  <a:srgbClr val="1F2328"/>
+                </a:solidFill>
+                <a:latin typeface="Apple SD Gothic Neo"/>
+                <a:ea typeface="Apple SD Gothic Neo"/>
+                <a:cs typeface="Apple SD Gothic Neo"/>
+              </a:rPr>
+              <a:t>episode, t</a:t>
+            </a:r>
+          </a:p>
+          <a:p>
+            <a:pPr algn="l">
+              <a:spcAft>
+                <a:spcPts val="500"/>
+              </a:spcAft>
+            </a:pPr>
+            <a:r>
+              <a:rPr sz="1200" b="1" i="0">
+                <a:solidFill>
+                  <a:srgbClr val="0B6E4F"/>
+                </a:solidFill>
+                <a:latin typeface="Apple SD Gothic Neo"/>
+                <a:ea typeface="Apple SD Gothic Neo"/>
+                <a:cs typeface="Apple SD Gothic Neo"/>
+              </a:rPr>
+              <a:t>관측  </a:t>
+            </a:r>
+            <a:r>
+              <a:rPr sz="1200" b="0" i="0">
+                <a:solidFill>
+                  <a:srgbClr val="1F2328"/>
+                </a:solidFill>
+                <a:latin typeface="Apple SD Gothic Neo"/>
+                <a:ea typeface="Apple SD Gothic Neo"/>
+                <a:cs typeface="Apple SD Gothic Neo"/>
+              </a:rPr>
+              <a:t>observation, next_observation</a:t>
+            </a:r>
+          </a:p>
+          <a:p>
+            <a:pPr algn="l">
+              <a:spcAft>
+                <a:spcPts val="500"/>
+              </a:spcAft>
+            </a:pPr>
+            <a:r>
+              <a:rPr sz="1200" b="1" i="0">
+                <a:solidFill>
+                  <a:srgbClr val="0B6E4F"/>
+                </a:solidFill>
+                <a:latin typeface="Apple SD Gothic Neo"/>
+                <a:ea typeface="Apple SD Gothic Neo"/>
+                <a:cs typeface="Apple SD Gothic Neo"/>
+              </a:rPr>
+              <a:t>행동  </a:t>
+            </a:r>
+            <a:r>
+              <a:rPr sz="1200" b="0" i="0">
+                <a:solidFill>
+                  <a:srgbClr val="1F2328"/>
+                </a:solidFill>
+                <a:latin typeface="Apple SD Gothic Neo"/>
+                <a:ea typeface="Apple SD Gothic Neo"/>
+                <a:cs typeface="Apple SD Gothic Neo"/>
+              </a:rPr>
+              <a:t>action_raw, action.accel_raw, action.lane_change_raw, action.lane_change, action.lane_change_applied</a:t>
+            </a:r>
+          </a:p>
+          <a:p>
+            <a:pPr algn="l">
+              <a:spcAft>
+                <a:spcPts val="500"/>
+              </a:spcAft>
+            </a:pPr>
+            <a:r>
+              <a:rPr sz="1200" b="1" i="0">
+                <a:solidFill>
+                  <a:srgbClr val="0B6E4F"/>
+                </a:solidFill>
+                <a:latin typeface="Apple SD Gothic Neo"/>
+                <a:ea typeface="Apple SD Gothic Neo"/>
+                <a:cs typeface="Apple SD Gothic Neo"/>
+              </a:rPr>
+              <a:t>결과  </a:t>
+            </a:r>
+            <a:r>
+              <a:rPr sz="1200" b="0" i="0">
+                <a:solidFill>
+                  <a:srgbClr val="1F2328"/>
+                </a:solidFill>
+                <a:latin typeface="Apple SD Gothic Neo"/>
+                <a:ea typeface="Apple SD Gothic Neo"/>
+                <a:cs typeface="Apple SD Gothic Neo"/>
+              </a:rPr>
+              <a:t>reward, terminated, truncated</a:t>
+            </a:r>
+          </a:p>
+          <a:p>
+            <a:pPr algn="l">
+              <a:spcAft>
+                <a:spcPts val="500"/>
+              </a:spcAft>
+            </a:pPr>
+            <a:r>
+              <a:rPr sz="1200" b="1" i="0">
+                <a:solidFill>
+                  <a:srgbClr val="0B6E4F"/>
+                </a:solidFill>
+                <a:latin typeface="Apple SD Gothic Neo"/>
+                <a:ea typeface="Apple SD Gothic Neo"/>
+                <a:cs typeface="Apple SD Gothic Neo"/>
+              </a:rPr>
+              <a:t>절대 상태  </a:t>
+            </a:r>
+            <a:r>
+              <a:rPr sz="1200" b="0" i="0">
+                <a:solidFill>
+                  <a:srgbClr val="1F2328"/>
+                </a:solidFill>
+                <a:latin typeface="Apple SD Gothic Neo"/>
+                <a:ea typeface="Apple SD Gothic Neo"/>
+                <a:cs typeface="Apple SD Gothic Neo"/>
+              </a:rPr>
+              <a:t>state, next_state  (AV·모든 차량의 위치·속도·차선)</a:t>
+            </a:r>
+          </a:p>
+          <a:p>
+            <a:pPr algn="l">
+              <a:spcAft>
+                <a:spcPts val="500"/>
+              </a:spcAft>
+            </a:pPr>
+            <a:r>
+              <a:rPr sz="1200" b="1" i="0">
+                <a:solidFill>
+                  <a:srgbClr val="0B6E4F"/>
+                </a:solidFill>
+                <a:latin typeface="Apple SD Gothic Neo"/>
+                <a:ea typeface="Apple SD Gothic Neo"/>
+                <a:cs typeface="Apple SD Gothic Neo"/>
+              </a:rPr>
+              <a:t>주변  </a:t>
+            </a:r>
+            <a:r>
+              <a:rPr sz="1200" b="0" i="0">
+                <a:solidFill>
+                  <a:srgbClr val="1F2328"/>
+                </a:solidFill>
+                <a:latin typeface="Apple SD Gothic Neo"/>
+                <a:ea typeface="Apple SD Gothic Neo"/>
+                <a:cs typeface="Apple SD Gothic Neo"/>
+              </a:rPr>
+              <a:t>detected_vehicles</a:t>
+            </a:r>
+          </a:p>
+          <a:p>
+            <a:pPr algn="l">
+              <a:spcAft>
+                <a:spcPts val="500"/>
+              </a:spcAft>
+            </a:pPr>
+            <a:r>
+              <a:rPr sz="1200" b="1" i="0">
+                <a:solidFill>
+                  <a:srgbClr val="0B6E4F"/>
+                </a:solidFill>
+                <a:latin typeface="Apple SD Gothic Neo"/>
+                <a:ea typeface="Apple SD Gothic Neo"/>
+                <a:cs typeface="Apple SD Gothic Neo"/>
+              </a:rPr>
+              <a:t>이벤트  </a:t>
+            </a:r>
+            <a:r>
+              <a:rPr sz="1200" b="0" i="0">
+                <a:solidFill>
+                  <a:srgbClr val="1F2328"/>
+                </a:solidFill>
+                <a:latin typeface="Apple SD Gothic Neo"/>
+                <a:ea typeface="Apple SD Gothic Neo"/>
+                <a:cs typeface="Apple SD Gothic Neo"/>
+              </a:rPr>
+              <a:t>event.collided, event.arrived, event.lane_before, event.lane_after</a:t>
             </a:r>
           </a:p>
         </p:txBody>
       </p:sp>
       <p:graphicFrame>
         <p:nvGraphicFramePr>
-          <p:cNvPr id="4" name="Table 3"/>
+          <p:cNvPr id="7" name="Table 6"/>
           <p:cNvGraphicFramePr>
             <a:graphicFrameLocks noGrp="1"/>
           </p:cNvGraphicFramePr>
           <p:nvPr/>
         </p:nvGraphicFramePr>
         <p:xfrm>
-          <a:off x="548640" y="1481328"/>
-          <a:ext cx="11064240" cy="4325112"/>
+          <a:off x="4709160" y="1481328"/>
+          <a:ext cx="6903720" cy="3383280"/>
         </p:xfrm>
         <a:graphic>
           <a:graphicData uri="http://schemas.openxmlformats.org/drawingml/2006/table">
@@ -9929,12 +10797,11 @@
                 <a:tableStyleId>{5C22544A-7EE6-4342-B048-85BDC9FD1C3A}</a:tableStyleId>
               </a:tblPr>
               <a:tblGrid>
-                <a:gridCol w="1234440"/>
-                <a:gridCol w="3703320"/>
-                <a:gridCol w="1920240"/>
-                <a:gridCol w="4206240"/>
+                <a:gridCol w="2697480"/>
+                <a:gridCol w="1600200"/>
+                <a:gridCol w="2606040"/>
               </a:tblGrid>
-              <a:tr h="393192">
+              <a:tr h="411480">
                 <a:tc>
                   <a:txBody>
                     <a:bodyPr/>
@@ -9949,35 +10816,11 @@
                           <a:ea typeface="Apple SD Gothic Neo"/>
                           <a:cs typeface="Apple SD Gothic Neo"/>
                         </a:rPr>
-                        <a:t>구분</a:t>
+                        <a:t>추가 항목</a:t>
                       </a:r>
                     </a:p>
                   </a:txBody>
-                  <a:tcPr marL="109728" marR="73152" marT="18288" marB="18288" anchor="ctr">
-                    <a:solidFill>
-                      <a:srgbClr val="1F2328"/>
-                    </a:solidFill>
-                  </a:tcPr>
-                </a:tc>
-                <a:tc>
-                  <a:txBody>
-                    <a:bodyPr/>
-                    <a:lstStyle/>
-                    <a:p>
-                      <a:r>
-                        <a:rPr sz="1300" b="1" i="0">
-                          <a:solidFill>
-                            <a:srgbClr val="FFFFFF"/>
-                          </a:solidFill>
-                          <a:latin typeface="Apple SD Gothic Neo"/>
-                          <a:ea typeface="Apple SD Gothic Neo"/>
-                          <a:cs typeface="Apple SD Gothic Neo"/>
-                        </a:rPr>
-                        <a:t>컬럼</a:t>
-                      </a:r>
-                    </a:p>
-                  </a:txBody>
-                  <a:tcPr marL="109728" marR="73152" marT="18288" marB="18288" anchor="ctr">
+                  <a:tcPr marL="109728" marR="73152" marT="27432" marB="27432" anchor="ctr">
                     <a:solidFill>
                       <a:srgbClr val="1F2328"/>
                     </a:solidFill>
@@ -10001,7 +10844,7 @@
                       </a:r>
                     </a:p>
                   </a:txBody>
-                  <a:tcPr marL="109728" marR="73152" marT="18288" marB="18288" anchor="ctr">
+                  <a:tcPr marL="109728" marR="73152" marT="27432" marB="27432" anchor="ctr">
                     <a:solidFill>
                       <a:srgbClr val="1F2328"/>
                     </a:solidFill>
@@ -10021,18 +10864,18 @@
                           <a:ea typeface="Apple SD Gothic Neo"/>
                           <a:cs typeface="Apple SD Gothic Neo"/>
                         </a:rPr>
-                        <a:t>의미</a:t>
+                        <a:t>증명하는 평가 기준</a:t>
                       </a:r>
                     </a:p>
                   </a:txBody>
-                  <a:tcPr marL="109728" marR="73152" marT="18288" marB="18288" anchor="ctr">
+                  <a:tcPr marL="109728" marR="73152" marT="27432" marB="27432" anchor="ctr">
                     <a:solidFill>
                       <a:srgbClr val="1F2328"/>
                     </a:solidFill>
                   </a:tcPr>
                 </a:tc>
               </a:tr>
-              <a:tr h="393192">
+              <a:tr h="548640">
                 <a:tc>
                   <a:txBody>
                     <a:bodyPr/>
@@ -10047,37 +10890,13 @@
                           <a:ea typeface="Apple SD Gothic Neo"/>
                           <a:cs typeface="Apple SD Gothic Neo"/>
                         </a:rPr>
-                        <a:t>기본</a:t>
+                        <a:t>route.on_route</a:t>
                       </a:r>
                     </a:p>
                   </a:txBody>
-                  <a:tcPr marL="109728" marR="73152" marT="18288" marB="18288" anchor="ctr">
+                  <a:tcPr marL="109728" marR="73152" marT="27432" marB="27432" anchor="ctr">
                     <a:solidFill>
-                      <a:srgbClr val="F1F3F5"/>
-                    </a:solidFill>
-                  </a:tcPr>
-                </a:tc>
-                <a:tc>
-                  <a:txBody>
-                    <a:bodyPr/>
-                    <a:lstStyle/>
-                    <a:p>
-                      <a:r>
-                        <a:rPr sz="1300" b="1" i="0">
-                          <a:solidFill>
-                            <a:srgbClr val="1F2328"/>
-                          </a:solidFill>
-                          <a:latin typeface="Apple SD Gothic Neo"/>
-                          <a:ea typeface="Apple SD Gothic Neo"/>
-                          <a:cs typeface="Apple SD Gothic Neo"/>
-                        </a:rPr>
-                        <a:t>episode, t</a:t>
-                      </a:r>
-                    </a:p>
-                  </a:txBody>
-                  <a:tcPr marL="109728" marR="73152" marT="18288" marB="18288" anchor="ctr">
-                    <a:solidFill>
-                      <a:srgbClr val="F1F3F5"/>
+                      <a:srgbClr val="FFF4D6"/>
                     </a:solidFill>
                   </a:tcPr>
                 </a:tc>
@@ -10095,13 +10914,13 @@
                           <a:ea typeface="Apple SD Gothic Neo"/>
                           <a:cs typeface="Apple SD Gothic Neo"/>
                         </a:rPr>
-                        <a:t>회, 스텝(0.5초)</a:t>
+                        <a:t>참/거짓</a:t>
                       </a:r>
                     </a:p>
                   </a:txBody>
-                  <a:tcPr marL="109728" marR="73152" marT="18288" marB="18288" anchor="ctr">
+                  <a:tcPr marL="109728" marR="73152" marT="27432" marB="27432" anchor="ctr">
                     <a:solidFill>
-                      <a:srgbClr val="F1F3F5"/>
+                      <a:srgbClr val="FFF4D6"/>
                     </a:solidFill>
                   </a:tcPr>
                 </a:tc>
@@ -10119,18 +10938,18 @@
                           <a:ea typeface="Apple SD Gothic Neo"/>
                           <a:cs typeface="Apple SD Gothic Neo"/>
                         </a:rPr>
-                        <a:t>에피소드 번호와 시간 순서</a:t>
+                        <a:t>잘못된 경로로 빠지지 않음</a:t>
                       </a:r>
                     </a:p>
                   </a:txBody>
-                  <a:tcPr marL="109728" marR="73152" marT="18288" marB="18288" anchor="ctr">
+                  <a:tcPr marL="109728" marR="73152" marT="27432" marB="27432" anchor="ctr">
                     <a:solidFill>
-                      <a:srgbClr val="F1F3F5"/>
+                      <a:srgbClr val="FFF4D6"/>
                     </a:solidFill>
                   </a:tcPr>
                 </a:tc>
               </a:tr>
-              <a:tr h="393192">
+              <a:tr h="777240">
                 <a:tc>
                   <a:txBody>
                     <a:bodyPr/>
@@ -10145,94 +10964,9 @@
                           <a:ea typeface="Apple SD Gothic Neo"/>
                           <a:cs typeface="Apple SD Gothic Neo"/>
                         </a:rPr>
-                        <a:t>기본</a:t>
+                        <a:t>route.dist_to_decision</a:t>
                       </a:r>
                     </a:p>
-                  </a:txBody>
-                  <a:tcPr marL="109728" marR="73152" marT="18288" marB="18288" anchor="ctr">
-                    <a:solidFill>
-                      <a:srgbClr val="F1F3F5"/>
-                    </a:solidFill>
-                  </a:tcPr>
-                </a:tc>
-                <a:tc>
-                  <a:txBody>
-                    <a:bodyPr/>
-                    <a:lstStyle/>
-                    <a:p>
-                      <a:r>
-                        <a:rPr sz="1300" b="1" i="0">
-                          <a:solidFill>
-                            <a:srgbClr val="1F2328"/>
-                          </a:solidFill>
-                          <a:latin typeface="Apple SD Gothic Neo"/>
-                          <a:ea typeface="Apple SD Gothic Neo"/>
-                          <a:cs typeface="Apple SD Gothic Neo"/>
-                        </a:rPr>
-                        <a:t>observation, next_observation</a:t>
-                      </a:r>
-                    </a:p>
-                  </a:txBody>
-                  <a:tcPr marL="109728" marR="73152" marT="18288" marB="18288" anchor="ctr">
-                    <a:solidFill>
-                      <a:srgbClr val="F1F3F5"/>
-                    </a:solidFill>
-                  </a:tcPr>
-                </a:tc>
-                <a:tc>
-                  <a:txBody>
-                    <a:bodyPr/>
-                    <a:lstStyle/>
-                    <a:p>
-                      <a:r>
-                        <a:rPr sz="1300" b="0" i="0">
-                          <a:solidFill>
-                            <a:srgbClr val="1F2328"/>
-                          </a:solidFill>
-                          <a:latin typeface="Apple SD Gothic Neo"/>
-                          <a:ea typeface="Apple SD Gothic Neo"/>
-                          <a:cs typeface="Apple SD Gothic Neo"/>
-                        </a:rPr>
-                        <a:t>31차원, -1~1</a:t>
-                      </a:r>
-                    </a:p>
-                  </a:txBody>
-                  <a:tcPr marL="109728" marR="73152" marT="18288" marB="18288" anchor="ctr">
-                    <a:solidFill>
-                      <a:srgbClr val="F1F3F5"/>
-                    </a:solidFill>
-                  </a:tcPr>
-                </a:tc>
-                <a:tc>
-                  <a:txBody>
-                    <a:bodyPr/>
-                    <a:lstStyle/>
-                    <a:p>
-                      <a:r>
-                        <a:rPr sz="1300" b="0" i="0">
-                          <a:solidFill>
-                            <a:srgbClr val="1F2328"/>
-                          </a:solidFill>
-                          <a:latin typeface="Apple SD Gothic Neo"/>
-                          <a:ea typeface="Apple SD Gothic Neo"/>
-                          <a:cs typeface="Apple SD Gothic Neo"/>
-                        </a:rPr>
-                        <a:t>AV가 보는 주변 5개 차선 정보</a:t>
-                      </a:r>
-                    </a:p>
-                  </a:txBody>
-                  <a:tcPr marL="109728" marR="73152" marT="18288" marB="18288" anchor="ctr">
-                    <a:solidFill>
-                      <a:srgbClr val="F1F3F5"/>
-                    </a:solidFill>
-                  </a:tcPr>
-                </a:tc>
-              </a:tr>
-              <a:tr h="393192">
-                <a:tc>
-                  <a:txBody>
-                    <a:bodyPr/>
-                    <a:lstStyle/>
                     <a:p>
                       <a:r>
                         <a:rPr sz="1300" b="1" i="0">
@@ -10243,233 +10977,13 @@
                           <a:ea typeface="Apple SD Gothic Neo"/>
                           <a:cs typeface="Apple SD Gothic Neo"/>
                         </a:rPr>
-                        <a:t>기본</a:t>
+                        <a:t>route.decision_type</a:t>
                       </a:r>
                     </a:p>
                   </a:txBody>
-                  <a:tcPr marL="109728" marR="73152" marT="18288" marB="18288" anchor="ctr">
+                  <a:tcPr marL="109728" marR="73152" marT="27432" marB="27432" anchor="ctr">
                     <a:solidFill>
-                      <a:srgbClr val="F1F3F5"/>
-                    </a:solidFill>
-                  </a:tcPr>
-                </a:tc>
-                <a:tc>
-                  <a:txBody>
-                    <a:bodyPr/>
-                    <a:lstStyle/>
-                    <a:p>
-                      <a:r>
-                        <a:rPr sz="1300" b="1" i="0">
-                          <a:solidFill>
-                            <a:srgbClr val="1F2328"/>
-                          </a:solidFill>
-                          <a:latin typeface="Apple SD Gothic Neo"/>
-                          <a:ea typeface="Apple SD Gothic Neo"/>
-                          <a:cs typeface="Apple SD Gothic Neo"/>
-                        </a:rPr>
-                        <a:t>action_raw</a:t>
-                      </a:r>
-                    </a:p>
-                  </a:txBody>
-                  <a:tcPr marL="109728" marR="73152" marT="18288" marB="18288" anchor="ctr">
-                    <a:solidFill>
-                      <a:srgbClr val="F1F3F5"/>
-                    </a:solidFill>
-                  </a:tcPr>
-                </a:tc>
-                <a:tc>
-                  <a:txBody>
-                    <a:bodyPr/>
-                    <a:lstStyle/>
-                    <a:p>
-                      <a:r>
-                        <a:rPr sz="1300" b="0" i="0">
-                          <a:solidFill>
-                            <a:srgbClr val="1F2328"/>
-                          </a:solidFill>
-                          <a:latin typeface="Apple SD Gothic Neo"/>
-                          <a:ea typeface="Apple SD Gothic Neo"/>
-                          <a:cs typeface="Apple SD Gothic Neo"/>
-                        </a:rPr>
-                        <a:t>2차원, -1~1</a:t>
-                      </a:r>
-                    </a:p>
-                  </a:txBody>
-                  <a:tcPr marL="109728" marR="73152" marT="18288" marB="18288" anchor="ctr">
-                    <a:solidFill>
-                      <a:srgbClr val="F1F3F5"/>
-                    </a:solidFill>
-                  </a:tcPr>
-                </a:tc>
-                <a:tc>
-                  <a:txBody>
-                    <a:bodyPr/>
-                    <a:lstStyle/>
-                    <a:p>
-                      <a:r>
-                        <a:rPr sz="1300" b="0" i="0">
-                          <a:solidFill>
-                            <a:srgbClr val="1F2328"/>
-                          </a:solidFill>
-                          <a:latin typeface="Apple SD Gothic Neo"/>
-                          <a:ea typeface="Apple SD Gothic Neo"/>
-                          <a:cs typeface="Apple SD Gothic Neo"/>
-                        </a:rPr>
-                        <a:t>가감속, 차선변경 명령</a:t>
-                      </a:r>
-                    </a:p>
-                  </a:txBody>
-                  <a:tcPr marL="109728" marR="73152" marT="18288" marB="18288" anchor="ctr">
-                    <a:solidFill>
-                      <a:srgbClr val="F1F3F5"/>
-                    </a:solidFill>
-                  </a:tcPr>
-                </a:tc>
-              </a:tr>
-              <a:tr h="393192">
-                <a:tc>
-                  <a:txBody>
-                    <a:bodyPr/>
-                    <a:lstStyle/>
-                    <a:p>
-                      <a:r>
-                        <a:rPr sz="1300" b="1" i="0">
-                          <a:solidFill>
-                            <a:srgbClr val="0B6E4F"/>
-                          </a:solidFill>
-                          <a:latin typeface="Apple SD Gothic Neo"/>
-                          <a:ea typeface="Apple SD Gothic Neo"/>
-                          <a:cs typeface="Apple SD Gothic Neo"/>
-                        </a:rPr>
-                        <a:t>기본</a:t>
-                      </a:r>
-                    </a:p>
-                  </a:txBody>
-                  <a:tcPr marL="109728" marR="73152" marT="18288" marB="18288" anchor="ctr">
-                    <a:solidFill>
-                      <a:srgbClr val="F1F3F5"/>
-                    </a:solidFill>
-                  </a:tcPr>
-                </a:tc>
-                <a:tc>
-                  <a:txBody>
-                    <a:bodyPr/>
-                    <a:lstStyle/>
-                    <a:p>
-                      <a:r>
-                        <a:rPr sz="1300" b="1" i="0">
-                          <a:solidFill>
-                            <a:srgbClr val="1F2328"/>
-                          </a:solidFill>
-                          <a:latin typeface="Apple SD Gothic Neo"/>
-                          <a:ea typeface="Apple SD Gothic Neo"/>
-                          <a:cs typeface="Apple SD Gothic Neo"/>
-                        </a:rPr>
-                        <a:t>reward, terminated, truncated</a:t>
-                      </a:r>
-                    </a:p>
-                  </a:txBody>
-                  <a:tcPr marL="109728" marR="73152" marT="18288" marB="18288" anchor="ctr">
-                    <a:solidFill>
-                      <a:srgbClr val="F1F3F5"/>
-                    </a:solidFill>
-                  </a:tcPr>
-                </a:tc>
-                <a:tc>
-                  <a:txBody>
-                    <a:bodyPr/>
-                    <a:lstStyle/>
-                    <a:p>
-                      <a:r>
-                        <a:rPr sz="1300" b="0" i="0">
-                          <a:solidFill>
-                            <a:srgbClr val="1F2328"/>
-                          </a:solidFill>
-                          <a:latin typeface="Apple SD Gothic Neo"/>
-                          <a:ea typeface="Apple SD Gothic Neo"/>
-                          <a:cs typeface="Apple SD Gothic Neo"/>
-                        </a:rPr>
-                        <a:t>-</a:t>
-                      </a:r>
-                    </a:p>
-                  </a:txBody>
-                  <a:tcPr marL="109728" marR="73152" marT="18288" marB="18288" anchor="ctr">
-                    <a:solidFill>
-                      <a:srgbClr val="F1F3F5"/>
-                    </a:solidFill>
-                  </a:tcPr>
-                </a:tc>
-                <a:tc>
-                  <a:txBody>
-                    <a:bodyPr/>
-                    <a:lstStyle/>
-                    <a:p>
-                      <a:r>
-                        <a:rPr sz="1300" b="0" i="0">
-                          <a:solidFill>
-                            <a:srgbClr val="1F2328"/>
-                          </a:solidFill>
-                          <a:latin typeface="Apple SD Gothic Neo"/>
-                          <a:ea typeface="Apple SD Gothic Neo"/>
-                          <a:cs typeface="Apple SD Gothic Neo"/>
-                        </a:rPr>
-                        <a:t>보상, 충돌·도착 종료, 시간초과</a:t>
-                      </a:r>
-                    </a:p>
-                  </a:txBody>
-                  <a:tcPr marL="109728" marR="73152" marT="18288" marB="18288" anchor="ctr">
-                    <a:solidFill>
-                      <a:srgbClr val="F1F3F5"/>
-                    </a:solidFill>
-                  </a:tcPr>
-                </a:tc>
-              </a:tr>
-              <a:tr h="393192">
-                <a:tc>
-                  <a:txBody>
-                    <a:bodyPr/>
-                    <a:lstStyle/>
-                    <a:p>
-                      <a:r>
-                        <a:rPr sz="1300" b="1" i="0">
-                          <a:solidFill>
-                            <a:srgbClr val="0B6E4F"/>
-                          </a:solidFill>
-                          <a:latin typeface="Apple SD Gothic Neo"/>
-                          <a:ea typeface="Apple SD Gothic Neo"/>
-                          <a:cs typeface="Apple SD Gothic Neo"/>
-                        </a:rPr>
-                        <a:t>절대 상태</a:t>
-                      </a:r>
-                    </a:p>
-                  </a:txBody>
-                  <a:tcPr marL="109728" marR="73152" marT="18288" marB="18288" anchor="ctr">
-                    <a:solidFill>
-                      <a:srgbClr val="E3F1EA"/>
-                    </a:solidFill>
-                  </a:tcPr>
-                </a:tc>
-                <a:tc>
-                  <a:txBody>
-                    <a:bodyPr/>
-                    <a:lstStyle/>
-                    <a:p>
-                      <a:r>
-                        <a:rPr sz="1300" b="1" i="0">
-                          <a:solidFill>
-                            <a:srgbClr val="1F2328"/>
-                          </a:solidFill>
-                          <a:latin typeface="Apple SD Gothic Neo"/>
-                          <a:ea typeface="Apple SD Gothic Neo"/>
-                          <a:cs typeface="Apple SD Gothic Neo"/>
-                        </a:rPr>
-                        <a:t>ego_x, ego_y</a:t>
-                      </a:r>
-                    </a:p>
-                  </a:txBody>
-                  <a:tcPr marL="109728" marR="73152" marT="18288" marB="18288" anchor="ctr">
-                    <a:solidFill>
-                      <a:srgbClr val="E3F1EA"/>
+                      <a:srgbClr val="FFF4D6"/>
                     </a:solidFill>
                   </a:tcPr>
                 </a:tc>
@@ -10490,17 +11004,6 @@
                         <a:t>m</a:t>
                       </a:r>
                     </a:p>
-                  </a:txBody>
-                  <a:tcPr marL="109728" marR="73152" marT="18288" marB="18288" anchor="ctr">
-                    <a:solidFill>
-                      <a:srgbClr val="E3F1EA"/>
-                    </a:solidFill>
-                  </a:tcPr>
-                </a:tc>
-                <a:tc>
-                  <a:txBody>
-                    <a:bodyPr/>
-                    <a:lstStyle/>
                     <a:p>
                       <a:r>
                         <a:rPr sz="1300" b="0" i="0">
@@ -10511,257 +11014,11 @@
                           <a:ea typeface="Apple SD Gothic Neo"/>
                           <a:cs typeface="Apple SD Gothic Neo"/>
                         </a:rPr>
-                        <a:t>지도 좌표 위 AV 위치</a:t>
+                        <a:t>합류·분기·신호</a:t>
                       </a:r>
                     </a:p>
                   </a:txBody>
-                  <a:tcPr marL="109728" marR="73152" marT="18288" marB="18288" anchor="ctr">
-                    <a:solidFill>
-                      <a:srgbClr val="E3F1EA"/>
-                    </a:solidFill>
-                  </a:tcPr>
-                </a:tc>
-              </a:tr>
-              <a:tr h="393192">
-                <a:tc>
-                  <a:txBody>
-                    <a:bodyPr/>
-                    <a:lstStyle/>
-                    <a:p>
-                      <a:r>
-                        <a:rPr sz="1300" b="1" i="0">
-                          <a:solidFill>
-                            <a:srgbClr val="0B6E4F"/>
-                          </a:solidFill>
-                          <a:latin typeface="Apple SD Gothic Neo"/>
-                          <a:ea typeface="Apple SD Gothic Neo"/>
-                          <a:cs typeface="Apple SD Gothic Neo"/>
-                        </a:rPr>
-                        <a:t>절대 상태</a:t>
-                      </a:r>
-                    </a:p>
-                  </a:txBody>
-                  <a:tcPr marL="109728" marR="73152" marT="18288" marB="18288" anchor="ctr">
-                    <a:solidFill>
-                      <a:srgbClr val="E3F1EA"/>
-                    </a:solidFill>
-                  </a:tcPr>
-                </a:tc>
-                <a:tc>
-                  <a:txBody>
-                    <a:bodyPr/>
-                    <a:lstStyle/>
-                    <a:p>
-                      <a:r>
-                        <a:rPr sz="1300" b="1" i="0">
-                          <a:solidFill>
-                            <a:srgbClr val="1F2328"/>
-                          </a:solidFill>
-                          <a:latin typeface="Apple SD Gothic Neo"/>
-                          <a:ea typeface="Apple SD Gothic Neo"/>
-                          <a:cs typeface="Apple SD Gothic Neo"/>
-                        </a:rPr>
-                        <a:t>ego_speed, ego_lane, ego_road_id</a:t>
-                      </a:r>
-                    </a:p>
-                  </a:txBody>
-                  <a:tcPr marL="109728" marR="73152" marT="18288" marB="18288" anchor="ctr">
-                    <a:solidFill>
-                      <a:srgbClr val="E3F1EA"/>
-                    </a:solidFill>
-                  </a:tcPr>
-                </a:tc>
-                <a:tc>
-                  <a:txBody>
-                    <a:bodyPr/>
-                    <a:lstStyle/>
-                    <a:p>
-                      <a:r>
-                        <a:rPr sz="1300" b="0" i="0">
-                          <a:solidFill>
-                            <a:srgbClr val="1F2328"/>
-                          </a:solidFill>
-                          <a:latin typeface="Apple SD Gothic Neo"/>
-                          <a:ea typeface="Apple SD Gothic Neo"/>
-                          <a:cs typeface="Apple SD Gothic Neo"/>
-                        </a:rPr>
-                        <a:t>m/s, 번호, ID</a:t>
-                      </a:r>
-                    </a:p>
-                  </a:txBody>
-                  <a:tcPr marL="109728" marR="73152" marT="18288" marB="18288" anchor="ctr">
-                    <a:solidFill>
-                      <a:srgbClr val="E3F1EA"/>
-                    </a:solidFill>
-                  </a:tcPr>
-                </a:tc>
-                <a:tc>
-                  <a:txBody>
-                    <a:bodyPr/>
-                    <a:lstStyle/>
-                    <a:p>
-                      <a:r>
-                        <a:rPr sz="1300" b="0" i="0">
-                          <a:solidFill>
-                            <a:srgbClr val="1F2328"/>
-                          </a:solidFill>
-                          <a:latin typeface="Apple SD Gothic Neo"/>
-                          <a:ea typeface="Apple SD Gothic Neo"/>
-                          <a:cs typeface="Apple SD Gothic Neo"/>
-                        </a:rPr>
-                        <a:t>AV 속도, 차선, 도로 구간</a:t>
-                      </a:r>
-                    </a:p>
-                  </a:txBody>
-                  <a:tcPr marL="109728" marR="73152" marT="18288" marB="18288" anchor="ctr">
-                    <a:solidFill>
-                      <a:srgbClr val="E3F1EA"/>
-                    </a:solidFill>
-                  </a:tcPr>
-                </a:tc>
-              </a:tr>
-              <a:tr h="393192">
-                <a:tc>
-                  <a:txBody>
-                    <a:bodyPr/>
-                    <a:lstStyle/>
-                    <a:p>
-                      <a:r>
-                        <a:rPr sz="1300" b="1" i="0">
-                          <a:solidFill>
-                            <a:srgbClr val="0B6E4F"/>
-                          </a:solidFill>
-                          <a:latin typeface="Apple SD Gothic Neo"/>
-                          <a:ea typeface="Apple SD Gothic Neo"/>
-                          <a:cs typeface="Apple SD Gothic Neo"/>
-                        </a:rPr>
-                        <a:t>절대 상태</a:t>
-                      </a:r>
-                    </a:p>
-                  </a:txBody>
-                  <a:tcPr marL="109728" marR="73152" marT="18288" marB="18288" anchor="ctr">
-                    <a:solidFill>
-                      <a:srgbClr val="E3F1EA"/>
-                    </a:solidFill>
-                  </a:tcPr>
-                </a:tc>
-                <a:tc>
-                  <a:txBody>
-                    <a:bodyPr/>
-                    <a:lstStyle/>
-                    <a:p>
-                      <a:r>
-                        <a:rPr sz="1300" b="1" i="0">
-                          <a:solidFill>
-                            <a:srgbClr val="1F2328"/>
-                          </a:solidFill>
-                          <a:latin typeface="Apple SD Gothic Neo"/>
-                          <a:ea typeface="Apple SD Gothic Neo"/>
-                          <a:cs typeface="Apple SD Gothic Neo"/>
-                        </a:rPr>
-                        <a:t>vehicles</a:t>
-                      </a:r>
-                    </a:p>
-                  </a:txBody>
-                  <a:tcPr marL="109728" marR="73152" marT="18288" marB="18288" anchor="ctr">
-                    <a:solidFill>
-                      <a:srgbClr val="E3F1EA"/>
-                    </a:solidFill>
-                  </a:tcPr>
-                </a:tc>
-                <a:tc>
-                  <a:txBody>
-                    <a:bodyPr/>
-                    <a:lstStyle/>
-                    <a:p>
-                      <a:r>
-                        <a:rPr sz="1300" b="0" i="0">
-                          <a:solidFill>
-                            <a:srgbClr val="1F2328"/>
-                          </a:solidFill>
-                          <a:latin typeface="Apple SD Gothic Neo"/>
-                          <a:ea typeface="Apple SD Gothic Neo"/>
-                          <a:cs typeface="Apple SD Gothic Neo"/>
-                        </a:rPr>
-                        <a:t>m, m/s</a:t>
-                      </a:r>
-                    </a:p>
-                  </a:txBody>
-                  <a:tcPr marL="109728" marR="73152" marT="18288" marB="18288" anchor="ctr">
-                    <a:solidFill>
-                      <a:srgbClr val="E3F1EA"/>
-                    </a:solidFill>
-                  </a:tcPr>
-                </a:tc>
-                <a:tc>
-                  <a:txBody>
-                    <a:bodyPr/>
-                    <a:lstStyle/>
-                    <a:p>
-                      <a:r>
-                        <a:rPr sz="1300" b="0" i="0">
-                          <a:solidFill>
-                            <a:srgbClr val="1F2328"/>
-                          </a:solidFill>
-                          <a:latin typeface="Apple SD Gothic Neo"/>
-                          <a:ea typeface="Apple SD Gothic Neo"/>
-                          <a:cs typeface="Apple SD Gothic Neo"/>
-                        </a:rPr>
-                        <a:t>모든 차량의 위치·속도·차선</a:t>
-                      </a:r>
-                    </a:p>
-                  </a:txBody>
-                  <a:tcPr marL="109728" marR="73152" marT="18288" marB="18288" anchor="ctr">
-                    <a:solidFill>
-                      <a:srgbClr val="E3F1EA"/>
-                    </a:solidFill>
-                  </a:tcPr>
-                </a:tc>
-              </a:tr>
-              <a:tr h="393192">
-                <a:tc>
-                  <a:txBody>
-                    <a:bodyPr/>
-                    <a:lstStyle/>
-                    <a:p>
-                      <a:r>
-                        <a:rPr sz="1300" b="1" i="0">
-                          <a:solidFill>
-                            <a:srgbClr val="0B6E4F"/>
-                          </a:solidFill>
-                          <a:latin typeface="Apple SD Gothic Neo"/>
-                          <a:ea typeface="Apple SD Gothic Neo"/>
-                          <a:cs typeface="Apple SD Gothic Neo"/>
-                        </a:rPr>
-                        <a:t>추가 제안</a:t>
-                      </a:r>
-                    </a:p>
-                  </a:txBody>
-                  <a:tcPr marL="109728" marR="73152" marT="18288" marB="18288" anchor="ctr">
-                    <a:solidFill>
-                      <a:srgbClr val="FFF4D6"/>
-                    </a:solidFill>
-                  </a:tcPr>
-                </a:tc>
-                <a:tc>
-                  <a:txBody>
-                    <a:bodyPr/>
-                    <a:lstStyle/>
-                    <a:p>
-                      <a:r>
-                        <a:rPr sz="1300" b="1" i="0">
-                          <a:solidFill>
-                            <a:srgbClr val="1F2328"/>
-                          </a:solidFill>
-                          <a:latin typeface="Apple SD Gothic Neo"/>
-                          <a:ea typeface="Apple SD Gothic Neo"/>
-                          <a:cs typeface="Apple SD Gothic Neo"/>
-                        </a:rPr>
-                        <a:t>segment_id, route_progress</a:t>
-                      </a:r>
-                    </a:p>
-                  </a:txBody>
-                  <a:tcPr marL="109728" marR="73152" marT="18288" marB="18288" anchor="ctr">
+                  <a:tcPr marL="109728" marR="73152" marT="27432" marB="27432" anchor="ctr">
                     <a:solidFill>
                       <a:srgbClr val="FFF4D6"/>
                     </a:solidFill>
@@ -10781,11 +11038,37 @@
                           <a:ea typeface="Apple SD Gothic Neo"/>
                           <a:cs typeface="Apple SD Gothic Neo"/>
                         </a:rPr>
-                        <a:t>1~4, m</a:t>
+                        <a:t>기한 안에 차선을 옮김</a:t>
                       </a:r>
                     </a:p>
                   </a:txBody>
-                  <a:tcPr marL="109728" marR="73152" marT="18288" marB="18288" anchor="ctr">
+                  <a:tcPr marL="109728" marR="73152" marT="27432" marB="27432" anchor="ctr">
+                    <a:solidFill>
+                      <a:srgbClr val="FFF4D6"/>
+                    </a:solidFill>
+                  </a:tcPr>
+                </a:tc>
+              </a:tr>
+              <a:tr h="548640">
+                <a:tc>
+                  <a:txBody>
+                    <a:bodyPr/>
+                    <a:lstStyle/>
+                    <a:p>
+                      <a:r>
+                        <a:rPr sz="1300" b="1" i="0">
+                          <a:solidFill>
+                            <a:srgbClr val="0B6E4F"/>
+                          </a:solidFill>
+                          <a:latin typeface="Apple SD Gothic Neo"/>
+                          <a:ea typeface="Apple SD Gothic Neo"/>
+                          <a:cs typeface="Apple SD Gothic Neo"/>
+                        </a:rPr>
+                        <a:t>route.lane_ok</a:t>
+                      </a:r>
+                    </a:p>
+                  </a:txBody>
+                  <a:tcPr marL="109728" marR="73152" marT="27432" marB="27432" anchor="ctr">
                     <a:solidFill>
                       <a:srgbClr val="FFF4D6"/>
                     </a:solidFill>
@@ -10805,61 +11088,11 @@
                           <a:ea typeface="Apple SD Gothic Neo"/>
                           <a:cs typeface="Apple SD Gothic Neo"/>
                         </a:rPr>
-                        <a:t>구간 번호, 경로상 진행 거리</a:t>
+                        <a:t>참/거짓</a:t>
                       </a:r>
                     </a:p>
                   </a:txBody>
-                  <a:tcPr marL="109728" marR="73152" marT="18288" marB="18288" anchor="ctr">
-                    <a:solidFill>
-                      <a:srgbClr val="FFF4D6"/>
-                    </a:solidFill>
-                  </a:tcPr>
-                </a:tc>
-              </a:tr>
-              <a:tr h="393192">
-                <a:tc>
-                  <a:txBody>
-                    <a:bodyPr/>
-                    <a:lstStyle/>
-                    <a:p>
-                      <a:r>
-                        <a:rPr sz="1300" b="1" i="0">
-                          <a:solidFill>
-                            <a:srgbClr val="0B6E4F"/>
-                          </a:solidFill>
-                          <a:latin typeface="Apple SD Gothic Neo"/>
-                          <a:ea typeface="Apple SD Gothic Neo"/>
-                          <a:cs typeface="Apple SD Gothic Neo"/>
-                        </a:rPr>
-                        <a:t>추가 제안</a:t>
-                      </a:r>
-                    </a:p>
-                  </a:txBody>
-                  <a:tcPr marL="109728" marR="73152" marT="18288" marB="18288" anchor="ctr">
-                    <a:solidFill>
-                      <a:srgbClr val="FFF4D6"/>
-                    </a:solidFill>
-                  </a:tcPr>
-                </a:tc>
-                <a:tc>
-                  <a:txBody>
-                    <a:bodyPr/>
-                    <a:lstStyle/>
-                    <a:p>
-                      <a:r>
-                        <a:rPr sz="1300" b="1" i="0">
-                          <a:solidFill>
-                            <a:srgbClr val="1F2328"/>
-                          </a:solidFill>
-                          <a:latin typeface="Apple SD Gothic Neo"/>
-                          <a:ea typeface="Apple SD Gothic Neo"/>
-                          <a:cs typeface="Apple SD Gothic Neo"/>
-                        </a:rPr>
-                        <a:t>dist_to_exit, target_lane_offset</a:t>
-                      </a:r>
-                    </a:p>
-                  </a:txBody>
-                  <a:tcPr marL="109728" marR="73152" marT="18288" marB="18288" anchor="ctr">
+                  <a:tcPr marL="109728" marR="73152" marT="27432" marB="27432" anchor="ctr">
                     <a:solidFill>
                       <a:srgbClr val="FFF4D6"/>
                     </a:solidFill>
@@ -10879,11 +11112,37 @@
                           <a:ea typeface="Apple SD Gothic Neo"/>
                           <a:cs typeface="Apple SD Gothic Neo"/>
                         </a:rPr>
-                        <a:t>m, 차선 수</a:t>
+                        <a:t>경로로 이어지는 차선에 있음</a:t>
                       </a:r>
                     </a:p>
                   </a:txBody>
-                  <a:tcPr marL="109728" marR="73152" marT="18288" marB="18288" anchor="ctr">
+                  <a:tcPr marL="109728" marR="73152" marT="27432" marB="27432" anchor="ctr">
+                    <a:solidFill>
+                      <a:srgbClr val="FFF4D6"/>
+                    </a:solidFill>
+                  </a:tcPr>
+                </a:tc>
+              </a:tr>
+              <a:tr h="548640">
+                <a:tc>
+                  <a:txBody>
+                    <a:bodyPr/>
+                    <a:lstStyle/>
+                    <a:p>
+                      <a:r>
+                        <a:rPr sz="1300" b="1" i="0">
+                          <a:solidFill>
+                            <a:srgbClr val="0B6E4F"/>
+                          </a:solidFill>
+                          <a:latin typeface="Apple SD Gothic Neo"/>
+                          <a:ea typeface="Apple SD Gothic Neo"/>
+                          <a:cs typeface="Apple SD Gothic Neo"/>
+                        </a:rPr>
+                        <a:t>ego.stopped_time</a:t>
+                      </a:r>
+                    </a:p>
+                  </a:txBody>
+                  <a:tcPr marL="109728" marR="73152" marT="27432" marB="27432" anchor="ctr">
                     <a:solidFill>
                       <a:srgbClr val="FFF4D6"/>
                     </a:solidFill>
@@ -10903,61 +11162,11 @@
                           <a:ea typeface="Apple SD Gothic Neo"/>
                           <a:cs typeface="Apple SD Gothic Neo"/>
                         </a:rPr>
-                        <a:t>출구까지 거리, 목표 차선까지 차이</a:t>
+                        <a:t>초</a:t>
                       </a:r>
                     </a:p>
                   </a:txBody>
-                  <a:tcPr marL="109728" marR="73152" marT="18288" marB="18288" anchor="ctr">
-                    <a:solidFill>
-                      <a:srgbClr val="FFF4D6"/>
-                    </a:solidFill>
-                  </a:tcPr>
-                </a:tc>
-              </a:tr>
-              <a:tr h="393192">
-                <a:tc>
-                  <a:txBody>
-                    <a:bodyPr/>
-                    <a:lstStyle/>
-                    <a:p>
-                      <a:r>
-                        <a:rPr sz="1300" b="1" i="0">
-                          <a:solidFill>
-                            <a:srgbClr val="0B6E4F"/>
-                          </a:solidFill>
-                          <a:latin typeface="Apple SD Gothic Neo"/>
-                          <a:ea typeface="Apple SD Gothic Neo"/>
-                          <a:cs typeface="Apple SD Gothic Neo"/>
-                        </a:rPr>
-                        <a:t>추가 제안</a:t>
-                      </a:r>
-                    </a:p>
-                  </a:txBody>
-                  <a:tcPr marL="109728" marR="73152" marT="18288" marB="18288" anchor="ctr">
-                    <a:solidFill>
-                      <a:srgbClr val="FFF4D6"/>
-                    </a:solidFill>
-                  </a:tcPr>
-                </a:tc>
-                <a:tc>
-                  <a:txBody>
-                    <a:bodyPr/>
-                    <a:lstStyle/>
-                    <a:p>
-                      <a:r>
-                        <a:rPr sz="1300" b="1" i="0">
-                          <a:solidFill>
-                            <a:srgbClr val="1F2328"/>
-                          </a:solidFill>
-                          <a:latin typeface="Apple SD Gothic Neo"/>
-                          <a:ea typeface="Apple SD Gothic Neo"/>
-                          <a:cs typeface="Apple SD Gothic Neo"/>
-                        </a:rPr>
-                        <a:t>tls_state, dist_to_stopline</a:t>
-                      </a:r>
-                    </a:p>
-                  </a:txBody>
-                  <a:tcPr marL="109728" marR="73152" marT="18288" marB="18288" anchor="ctr">
+                  <a:tcPr marL="109728" marR="73152" marT="27432" marB="27432" anchor="ctr">
                     <a:solidFill>
                       <a:srgbClr val="FFF4D6"/>
                     </a:solidFill>
@@ -10977,11 +11186,37 @@
                           <a:ea typeface="Apple SD Gothic Neo"/>
                           <a:cs typeface="Apple SD Gothic Neo"/>
                         </a:rPr>
-                        <a:t>적·황·녹, m</a:t>
+                        <a:t>비정상 정지·무한 대기 없음</a:t>
                       </a:r>
                     </a:p>
                   </a:txBody>
-                  <a:tcPr marL="109728" marR="73152" marT="18288" marB="18288" anchor="ctr">
+                  <a:tcPr marL="109728" marR="73152" marT="27432" marB="27432" anchor="ctr">
+                    <a:solidFill>
+                      <a:srgbClr val="FFF4D6"/>
+                    </a:solidFill>
+                  </a:tcPr>
+                </a:tc>
+              </a:tr>
+              <a:tr h="548640">
+                <a:tc>
+                  <a:txBody>
+                    <a:bodyPr/>
+                    <a:lstStyle/>
+                    <a:p>
+                      <a:r>
+                        <a:rPr sz="1300" b="1" i="0">
+                          <a:solidFill>
+                            <a:srgbClr val="0B6E4F"/>
+                          </a:solidFill>
+                          <a:latin typeface="Apple SD Gothic Neo"/>
+                          <a:ea typeface="Apple SD Gothic Neo"/>
+                          <a:cs typeface="Apple SD Gothic Neo"/>
+                        </a:rPr>
+                        <a:t>traffic.n_nearby</a:t>
+                      </a:r>
+                    </a:p>
+                  </a:txBody>
+                  <a:tcPr marL="109728" marR="73152" marT="27432" marB="27432" anchor="ctr">
                     <a:solidFill>
                       <a:srgbClr val="FFF4D6"/>
                     </a:solidFill>
@@ -11001,11 +11236,35 @@
                           <a:ea typeface="Apple SD Gothic Neo"/>
                           <a:cs typeface="Apple SD Gothic Neo"/>
                         </a:rPr>
-                        <a:t>신호 상태, 정지선까지 거리</a:t>
+                        <a:t>대 (50 m 이내)</a:t>
                       </a:r>
                     </a:p>
                   </a:txBody>
-                  <a:tcPr marL="109728" marR="73152" marT="18288" marB="18288" anchor="ctr">
+                  <a:tcPr marL="109728" marR="73152" marT="27432" marB="27432" anchor="ctr">
+                    <a:solidFill>
+                      <a:srgbClr val="FFF4D6"/>
+                    </a:solidFill>
+                  </a:tcPr>
+                </a:tc>
+                <a:tc>
+                  <a:txBody>
+                    <a:bodyPr/>
+                    <a:lstStyle/>
+                    <a:p>
+                      <a:r>
+                        <a:rPr sz="1300" b="0" i="0">
+                          <a:solidFill>
+                            <a:srgbClr val="1F2328"/>
+                          </a:solidFill>
+                          <a:latin typeface="Apple SD Gothic Neo"/>
+                          <a:ea typeface="Apple SD Gothic Neo"/>
+                          <a:cs typeface="Apple SD Gothic Neo"/>
+                        </a:rPr>
+                        <a:t>평가 시 일반 차량 충분</a:t>
+                      </a:r>
+                    </a:p>
+                  </a:txBody>
+                  <a:tcPr marL="109728" marR="73152" marT="27432" marB="27432" anchor="ctr">
                     <a:solidFill>
                       <a:srgbClr val="FFF4D6"/>
                     </a:solidFill>
@@ -11018,14 +11277,14 @@
       </p:graphicFrame>
       <p:sp>
         <p:nvSpPr>
-          <p:cNvPr id="5" name="TextBox 4"/>
+          <p:cNvPr id="8" name="TextBox 7"/>
           <p:cNvSpPr txBox="1"/>
           <p:nvPr/>
         </p:nvSpPr>
         <p:spPr>
           <a:xfrm>
-            <a:off x="548640" y="5989320"/>
-            <a:ext cx="11064240" cy="457200"/>
+            <a:off x="4709160" y="4983480"/>
+            <a:ext cx="6949440" cy="777240"/>
           </a:xfrm>
           <a:prstGeom prst="rect">
             <a:avLst/>
@@ -11040,6 +11299,79 @@
           <a:p>
             <a:pPr algn="l"/>
             <a:r>
+              <a:rPr sz="1300" b="1" i="0">
+                <a:solidFill>
+                  <a:srgbClr val="0B6E4F"/>
+                </a:solidFill>
+                <a:latin typeface="Apple SD Gothic Neo"/>
+                <a:ea typeface="Apple SD Gothic Neo"/>
+                <a:cs typeface="Apple SD Gothic Neo"/>
+              </a:rPr>
+              <a:t>확장 계획  </a:t>
+            </a:r>
+            <a:r>
+              <a:rPr sz="1300" b="0" i="0">
+                <a:solidFill>
+                  <a:srgbClr val="1F2328"/>
+                </a:solidFill>
+                <a:latin typeface="Apple SD Gothic Neo"/>
+                <a:ea typeface="Apple SD Gothic Neo"/>
+                <a:cs typeface="Apple SD Gothic Neo"/>
+              </a:rPr>
+              <a:t>앞뒤 차량 ID(끼어들기·양보), 충돌 예상 시간, 신호 상태, 위도·경도</a:t>
+            </a:r>
+          </a:p>
+          <a:p>
+            <a:pPr algn="l"/>
+            <a:r>
+              <a:rPr sz="1300" b="1" i="0">
+                <a:solidFill>
+                  <a:srgbClr val="0B6E4F"/>
+                </a:solidFill>
+                <a:latin typeface="Apple SD Gothic Neo"/>
+                <a:ea typeface="Apple SD Gothic Neo"/>
+                <a:cs typeface="Apple SD Gothic Neo"/>
+              </a:rPr>
+              <a:t>에피소드 정보  </a:t>
+            </a:r>
+            <a:r>
+              <a:rPr sz="1300" b="0" i="0">
+                <a:solidFill>
+                  <a:srgbClr val="1F2328"/>
+                </a:solidFill>
+                <a:latin typeface="Apple SD Gothic Neo"/>
+                <a:ea typeface="Apple SD Gothic Neo"/>
+                <a:cs typeface="Apple SD Gothic Neo"/>
+              </a:rPr>
+              <a:t>구간, 교통량, 차량 구성, 정책, 결과, 순간이동 수</a:t>
+            </a:r>
+          </a:p>
+        </p:txBody>
+      </p:sp>
+      <p:sp>
+        <p:nvSpPr>
+          <p:cNvPr id="9" name="TextBox 8"/>
+          <p:cNvSpPr txBox="1"/>
+          <p:nvPr/>
+        </p:nvSpPr>
+        <p:spPr>
+          <a:xfrm>
+            <a:off x="548640" y="5989320"/>
+            <a:ext cx="11064240" cy="457200"/>
+          </a:xfrm>
+          <a:prstGeom prst="rect">
+            <a:avLst/>
+          </a:prstGeom>
+          <a:noFill/>
+        </p:spPr>
+        <p:txBody>
+          <a:bodyPr wrap="square" anchor="t" lIns="0" rIns="0" tIns="0" bIns="0">
+            <a:spAutoFit/>
+          </a:bodyPr>
+          <a:lstStyle/>
+          <a:p>
+            <a:pPr algn="l"/>
+            <a:r>
               <a:rPr sz="1400" b="1" i="0">
                 <a:solidFill>
                   <a:srgbClr val="0B6E4F"/>
@@ -11059,7 +11391,7 @@
                 <a:ea typeface="Apple SD Gothic Neo"/>
                 <a:cs typeface="Apple SD Gothic Neo"/>
               </a:rPr>
-              <a:t>NPZ(학습용 배열) + JSONL.GZ(전체 상태)  →  Hugging Face 공개     </a:t>
+              <a:t>NPZ + JSONL.GZ → Hugging Face, 구간·정책별 폴더     </a:t>
             </a:r>
             <a:r>
               <a:rPr sz="1400" b="1" i="0">
@@ -11081,7 +11413,7 @@
                 <a:ea typeface="Apple SD Gothic Neo"/>
                 <a:cs typeface="Apple SD Gothic Neo"/>
               </a:rPr>
-              <a:t>1,000만 개 이상, 4개 구간 병렬 수집</a:t>
+              <a:t>1,000만 개 이상 (교통량·정책 조건을 바꿔 수집)</a:t>
             </a:r>
           </a:p>
         </p:txBody>
